--- a/slides/1_motivation.pptx
+++ b/slides/1_motivation.pptx
@@ -6,13 +6,14 @@
   </p:sldMasterIdLst>
   <p:sldIdLst>
     <p:sldId id="869" r:id="rId2"/>
-    <p:sldId id="280" r:id="rId3"/>
-    <p:sldId id="866" r:id="rId4"/>
-    <p:sldId id="272" r:id="rId5"/>
-    <p:sldId id="867" r:id="rId6"/>
-    <p:sldId id="552" r:id="rId7"/>
-    <p:sldId id="268" r:id="rId8"/>
-    <p:sldId id="868" r:id="rId9"/>
+    <p:sldId id="870" r:id="rId3"/>
+    <p:sldId id="280" r:id="rId4"/>
+    <p:sldId id="866" r:id="rId5"/>
+    <p:sldId id="272" r:id="rId6"/>
+    <p:sldId id="867" r:id="rId7"/>
+    <p:sldId id="552" r:id="rId8"/>
+    <p:sldId id="268" r:id="rId9"/>
+    <p:sldId id="868" r:id="rId10"/>
   </p:sldIdLst>
   <p:sldSz cx="12192000" cy="6858000"/>
   <p:notesSz cx="6858000" cy="9144000"/>
@@ -111,6 +112,11 @@
       </a:defRPr>
     </a:lvl9pPr>
   </p:defaultTextStyle>
+  <p:extLst>
+    <p:ext uri="{EFAFB233-063F-42B5-8137-9DF3F51BA10A}">
+      <p15:sldGuideLst xmlns:p15="http://schemas.microsoft.com/office/powerpoint/2012/main"/>
+    </p:ext>
+  </p:extLst>
 </p:presentation>
 </file>
 
@@ -3419,6 +3425,164 @@
           <p:cNvPr id="2" name="Titel 1">
             <a:extLst>
               <a:ext uri="{FF2B5EF4-FFF2-40B4-BE49-F238E27FC236}">
+                <a16:creationId xmlns:a16="http://schemas.microsoft.com/office/drawing/2014/main" id="{CA9CA6BA-760D-7EF0-A719-03B2550A55C4}"/>
+              </a:ext>
+            </a:extLst>
+          </p:cNvPr>
+          <p:cNvSpPr>
+            <a:spLocks noGrp="1"/>
+          </p:cNvSpPr>
+          <p:nvPr>
+            <p:ph type="title"/>
+          </p:nvPr>
+        </p:nvSpPr>
+        <p:spPr/>
+        <p:txBody>
+          <a:bodyPr/>
+          <a:lstStyle/>
+          <a:p>
+            <a:r>
+              <a:rPr lang="de-DE" dirty="0"/>
+              <a:t>Motivation</a:t>
+            </a:r>
+          </a:p>
+        </p:txBody>
+      </p:sp>
+      <p:sp>
+        <p:nvSpPr>
+          <p:cNvPr id="3" name="Inhaltsplatzhalter 2">
+            <a:extLst>
+              <a:ext uri="{FF2B5EF4-FFF2-40B4-BE49-F238E27FC236}">
+                <a16:creationId xmlns:a16="http://schemas.microsoft.com/office/drawing/2014/main" id="{0E39BB72-B215-EE3C-61CB-45E444CCCD27}"/>
+              </a:ext>
+            </a:extLst>
+          </p:cNvPr>
+          <p:cNvSpPr>
+            <a:spLocks noGrp="1"/>
+          </p:cNvSpPr>
+          <p:nvPr>
+            <p:ph idx="1"/>
+          </p:nvPr>
+        </p:nvSpPr>
+        <p:spPr/>
+        <p:txBody>
+          <a:bodyPr/>
+          <a:lstStyle/>
+          <a:p>
+            <a:pPr marL="0" indent="0">
+              <a:buNone/>
+            </a:pPr>
+            <a:endParaRPr lang="de-DE" dirty="0"/>
+          </a:p>
+          <a:p>
+            <a:r>
+              <a:rPr lang="de-DE" dirty="0"/>
+              <a:t>Control </a:t>
+            </a:r>
+            <a:r>
+              <a:rPr lang="de-DE" dirty="0" err="1"/>
+              <a:t>theory</a:t>
+            </a:r>
+            <a:r>
+              <a:rPr lang="de-DE" dirty="0"/>
+              <a:t> </a:t>
+            </a:r>
+            <a:r>
+              <a:rPr lang="de-DE" dirty="0" err="1"/>
+              <a:t>refresher</a:t>
+            </a:r>
+            <a:endParaRPr lang="de-DE" dirty="0"/>
+          </a:p>
+          <a:p>
+            <a:pPr marL="0" indent="0">
+              <a:buNone/>
+            </a:pPr>
+            <a:endParaRPr lang="de-DE" dirty="0"/>
+          </a:p>
+          <a:p>
+            <a:r>
+              <a:rPr lang="de-DE" dirty="0"/>
+              <a:t>Model </a:t>
+            </a:r>
+            <a:r>
+              <a:rPr lang="de-DE" dirty="0" err="1"/>
+              <a:t>Predictive</a:t>
+            </a:r>
+            <a:r>
+              <a:rPr lang="de-DE" dirty="0"/>
+              <a:t> Control</a:t>
+            </a:r>
+          </a:p>
+          <a:p>
+            <a:pPr marL="0" indent="0">
+              <a:buNone/>
+            </a:pPr>
+            <a:endParaRPr lang="de-DE" dirty="0"/>
+          </a:p>
+          <a:p>
+            <a:r>
+              <a:rPr lang="de-DE" dirty="0"/>
+              <a:t>Model-</a:t>
+            </a:r>
+            <a:r>
+              <a:rPr lang="de-DE" dirty="0" err="1"/>
+              <a:t>free</a:t>
+            </a:r>
+            <a:r>
+              <a:rPr lang="de-DE" dirty="0"/>
+              <a:t> vs. model-</a:t>
+            </a:r>
+            <a:r>
+              <a:rPr lang="de-DE" dirty="0" err="1"/>
+              <a:t>based</a:t>
+            </a:r>
+            <a:r>
+              <a:rPr lang="de-DE" dirty="0"/>
+              <a:t> </a:t>
+            </a:r>
+            <a:r>
+              <a:rPr lang="de-DE" dirty="0" err="1"/>
+              <a:t>control</a:t>
+            </a:r>
+            <a:endParaRPr lang="de-DE" dirty="0"/>
+          </a:p>
+        </p:txBody>
+      </p:sp>
+    </p:spTree>
+    <p:extLst>
+      <p:ext uri="{BB962C8B-B14F-4D97-AF65-F5344CB8AC3E}">
+        <p14:creationId xmlns:p14="http://schemas.microsoft.com/office/powerpoint/2010/main" val="489180509"/>
+      </p:ext>
+    </p:extLst>
+  </p:cSld>
+  <p:clrMapOvr>
+    <a:masterClrMapping/>
+  </p:clrMapOvr>
+</p:sld>
+</file>
+
+<file path=ppt/slides/slide3.xml><?xml version="1.0" encoding="utf-8"?>
+<p:sld xmlns:a="http://schemas.openxmlformats.org/drawingml/2006/main" xmlns:r="http://schemas.openxmlformats.org/officeDocument/2006/relationships" xmlns:p="http://schemas.openxmlformats.org/presentationml/2006/main">
+  <p:cSld>
+    <p:spTree>
+      <p:nvGrpSpPr>
+        <p:cNvPr id="1" name=""/>
+        <p:cNvGrpSpPr/>
+        <p:nvPr/>
+      </p:nvGrpSpPr>
+      <p:grpSpPr>
+        <a:xfrm>
+          <a:off x="0" y="0"/>
+          <a:ext cx="0" cy="0"/>
+          <a:chOff x="0" y="0"/>
+          <a:chExt cx="0" cy="0"/>
+        </a:xfrm>
+      </p:grpSpPr>
+      <p:sp>
+        <p:nvSpPr>
+          <p:cNvPr id="2" name="Titel 1">
+            <a:extLst>
+              <a:ext uri="{FF2B5EF4-FFF2-40B4-BE49-F238E27FC236}">
                 <a16:creationId xmlns:a16="http://schemas.microsoft.com/office/drawing/2014/main" id="{87AE0BB0-F77F-FA50-6B80-18D40A2D3E0D}"/>
               </a:ext>
             </a:extLst>
@@ -3568,7 +3732,7 @@
           <a:p>
             <a:fld id="{08C366F5-AFAD-49CB-854A-9D9E238FCA13}" type="slidenum">
               <a:rPr lang="en-GB" smtClean="0"/>
-              <a:t>2</a:t>
+              <a:t>3</a:t>
             </a:fld>
             <a:endParaRPr lang="en-GB"/>
           </a:p>
@@ -3861,7 +4025,7 @@
 </p:sld>
 </file>
 
-<file path=ppt/slides/slide3.xml><?xml version="1.0" encoding="utf-8"?>
+<file path=ppt/slides/slide4.xml><?xml version="1.0" encoding="utf-8"?>
 <p:sld xmlns:a="http://schemas.openxmlformats.org/drawingml/2006/main" xmlns:r="http://schemas.openxmlformats.org/officeDocument/2006/relationships" xmlns:p="http://schemas.openxmlformats.org/presentationml/2006/main">
   <p:cSld>
     <p:spTree>
@@ -4178,7 +4342,7 @@
           <a:p>
             <a:fld id="{08C366F5-AFAD-49CB-854A-9D9E238FCA13}" type="slidenum">
               <a:rPr lang="en-GB" smtClean="0"/>
-              <a:t>3</a:t>
+              <a:t>4</a:t>
             </a:fld>
             <a:endParaRPr lang="en-GB"/>
           </a:p>
@@ -4244,7 +4408,7 @@
 </p:sld>
 </file>
 
-<file path=ppt/slides/slide4.xml><?xml version="1.0" encoding="utf-8"?>
+<file path=ppt/slides/slide5.xml><?xml version="1.0" encoding="utf-8"?>
 <p:sld xmlns:a="http://schemas.openxmlformats.org/drawingml/2006/main" xmlns:r="http://schemas.openxmlformats.org/officeDocument/2006/relationships" xmlns:p="http://schemas.openxmlformats.org/presentationml/2006/main">
   <p:cSld>
     <p:spTree>
@@ -4383,7 +4547,7 @@
           <a:p>
             <a:fld id="{08C366F5-AFAD-49CB-854A-9D9E238FCA13}" type="slidenum">
               <a:rPr lang="en-GB" smtClean="0"/>
-              <a:t>4</a:t>
+              <a:t>5</a:t>
             </a:fld>
             <a:endParaRPr lang="en-GB"/>
           </a:p>
@@ -4581,441 +4745,6 @@
 </p:sld>
 </file>
 
-<file path=ppt/slides/slide5.xml><?xml version="1.0" encoding="utf-8"?>
-<p:sld xmlns:a="http://schemas.openxmlformats.org/drawingml/2006/main" xmlns:r="http://schemas.openxmlformats.org/officeDocument/2006/relationships" xmlns:p="http://schemas.openxmlformats.org/presentationml/2006/main">
-  <p:cSld>
-    <p:spTree>
-      <p:nvGrpSpPr>
-        <p:cNvPr id="1" name=""/>
-        <p:cNvGrpSpPr/>
-        <p:nvPr/>
-      </p:nvGrpSpPr>
-      <p:grpSpPr>
-        <a:xfrm>
-          <a:off x="0" y="0"/>
-          <a:ext cx="0" cy="0"/>
-          <a:chOff x="0" y="0"/>
-          <a:chExt cx="0" cy="0"/>
-        </a:xfrm>
-      </p:grpSpPr>
-      <p:sp>
-        <p:nvSpPr>
-          <p:cNvPr id="2" name="Titel 1">
-            <a:extLst>
-              <a:ext uri="{FF2B5EF4-FFF2-40B4-BE49-F238E27FC236}">
-                <a16:creationId xmlns:a16="http://schemas.microsoft.com/office/drawing/2014/main" id="{D4F7F74A-A7BD-EA84-615A-4CEB235273E4}"/>
-              </a:ext>
-            </a:extLst>
-          </p:cNvPr>
-          <p:cNvSpPr>
-            <a:spLocks noGrp="1"/>
-          </p:cNvSpPr>
-          <p:nvPr>
-            <p:ph type="title"/>
-          </p:nvPr>
-        </p:nvSpPr>
-        <p:spPr/>
-        <p:txBody>
-          <a:bodyPr/>
-          <a:lstStyle/>
-          <a:p>
-            <a:r>
-              <a:rPr lang="de-DE" dirty="0"/>
-              <a:t>Limits </a:t>
-            </a:r>
-            <a:r>
-              <a:rPr lang="de-DE" dirty="0" err="1"/>
-              <a:t>of</a:t>
-            </a:r>
-            <a:r>
-              <a:rPr lang="de-DE" dirty="0"/>
-              <a:t> Classic Control</a:t>
-            </a:r>
-          </a:p>
-        </p:txBody>
-      </p:sp>
-      <p:sp>
-        <p:nvSpPr>
-          <p:cNvPr id="3" name="Inhaltsplatzhalter 2">
-            <a:extLst>
-              <a:ext uri="{FF2B5EF4-FFF2-40B4-BE49-F238E27FC236}">
-                <a16:creationId xmlns:a16="http://schemas.microsoft.com/office/drawing/2014/main" id="{32324C2D-A5FE-AEF2-73A5-8CFC9C9545F1}"/>
-              </a:ext>
-            </a:extLst>
-          </p:cNvPr>
-          <p:cNvSpPr>
-            <a:spLocks noGrp="1"/>
-          </p:cNvSpPr>
-          <p:nvPr>
-            <p:ph idx="1"/>
-          </p:nvPr>
-        </p:nvSpPr>
-        <p:spPr/>
-        <p:txBody>
-          <a:bodyPr>
-            <a:normAutofit fontScale="92500" lnSpcReduction="10000"/>
-          </a:bodyPr>
-          <a:lstStyle/>
-          <a:p>
-            <a:r>
-              <a:rPr lang="de-DE" dirty="0" err="1"/>
-              <a:t>mostly</a:t>
-            </a:r>
-            <a:r>
-              <a:rPr lang="de-DE" dirty="0"/>
-              <a:t> </a:t>
-            </a:r>
-            <a:r>
-              <a:rPr lang="de-DE" dirty="0" err="1"/>
-              <a:t>reactive</a:t>
-            </a:r>
-            <a:r>
-              <a:rPr lang="de-DE" dirty="0"/>
-              <a:t>, </a:t>
-            </a:r>
-            <a:r>
-              <a:rPr lang="de-DE" dirty="0" err="1"/>
-              <a:t>tuned</a:t>
-            </a:r>
-            <a:r>
-              <a:rPr lang="de-DE" dirty="0"/>
-              <a:t> </a:t>
-            </a:r>
-            <a:r>
-              <a:rPr lang="de-DE" dirty="0" err="1"/>
-              <a:t>for</a:t>
-            </a:r>
-            <a:r>
-              <a:rPr lang="de-DE" dirty="0"/>
-              <a:t> simple linear </a:t>
-            </a:r>
-            <a:r>
-              <a:rPr lang="de-DE" dirty="0" err="1"/>
-              <a:t>systems</a:t>
-            </a:r>
-            <a:endParaRPr lang="de-DE" dirty="0"/>
-          </a:p>
-          <a:p>
-            <a:r>
-              <a:rPr lang="de-DE" dirty="0" err="1"/>
-              <a:t>poor</a:t>
-            </a:r>
-            <a:r>
-              <a:rPr lang="de-DE" dirty="0"/>
-              <a:t> </a:t>
-            </a:r>
-            <a:r>
-              <a:rPr lang="de-DE" dirty="0" err="1"/>
-              <a:t>handling</a:t>
-            </a:r>
-            <a:r>
-              <a:rPr lang="de-DE" dirty="0"/>
-              <a:t> </a:t>
-            </a:r>
-            <a:r>
-              <a:rPr lang="de-DE" dirty="0" err="1"/>
-              <a:t>of</a:t>
-            </a:r>
-            <a:r>
-              <a:rPr lang="de-DE" dirty="0"/>
-              <a:t> </a:t>
-            </a:r>
-            <a:r>
-              <a:rPr lang="de-DE" dirty="0" err="1"/>
-              <a:t>constraints</a:t>
-            </a:r>
-            <a:r>
-              <a:rPr lang="de-DE" dirty="0"/>
-              <a:t> and </a:t>
-            </a:r>
-            <a:r>
-              <a:rPr lang="de-DE" dirty="0" err="1"/>
-              <a:t>delays</a:t>
-            </a:r>
-            <a:endParaRPr lang="de-DE" dirty="0"/>
-          </a:p>
-          <a:p>
-            <a:r>
-              <a:rPr lang="de-DE" dirty="0" err="1"/>
-              <a:t>struggles</a:t>
-            </a:r>
-            <a:r>
-              <a:rPr lang="de-DE" dirty="0"/>
-              <a:t> </a:t>
-            </a:r>
-            <a:r>
-              <a:rPr lang="de-DE" dirty="0" err="1"/>
-              <a:t>with</a:t>
-            </a:r>
-            <a:r>
-              <a:rPr lang="de-DE" dirty="0"/>
-              <a:t> high-dimensional, </a:t>
-            </a:r>
-            <a:r>
-              <a:rPr lang="de-DE" dirty="0" err="1"/>
-              <a:t>nonlinear</a:t>
-            </a:r>
-            <a:r>
-              <a:rPr lang="de-DE" dirty="0"/>
-              <a:t>, </a:t>
-            </a:r>
-            <a:r>
-              <a:rPr lang="de-DE" dirty="0" err="1"/>
-              <a:t>or</a:t>
-            </a:r>
-            <a:r>
-              <a:rPr lang="de-DE" dirty="0"/>
-              <a:t> </a:t>
-            </a:r>
-            <a:r>
-              <a:rPr lang="de-DE" dirty="0" err="1"/>
-              <a:t>unstructured</a:t>
-            </a:r>
-            <a:r>
-              <a:rPr lang="de-DE" dirty="0"/>
-              <a:t> </a:t>
-            </a:r>
-            <a:r>
-              <a:rPr lang="de-DE" dirty="0" err="1"/>
-              <a:t>environments</a:t>
-            </a:r>
-            <a:endParaRPr lang="de-DE" dirty="0"/>
-          </a:p>
-          <a:p>
-            <a:pPr marL="0" indent="0">
-              <a:buNone/>
-            </a:pPr>
-            <a:endParaRPr lang="de-DE" dirty="0">
-              <a:sym typeface="Wingdings" pitchFamily="2" charset="2"/>
-            </a:endParaRPr>
-          </a:p>
-          <a:p>
-            <a:pPr marL="0" indent="0">
-              <a:buNone/>
-            </a:pPr>
-            <a:r>
-              <a:rPr lang="de-DE" dirty="0" err="1">
-                <a:sym typeface="Wingdings" pitchFamily="2" charset="2"/>
-              </a:rPr>
-              <a:t>m</a:t>
-            </a:r>
-            <a:r>
-              <a:rPr lang="de-DE" dirty="0" err="1"/>
-              <a:t>any</a:t>
-            </a:r>
-            <a:r>
-              <a:rPr lang="de-DE" dirty="0"/>
-              <a:t> modern </a:t>
-            </a:r>
-            <a:r>
-              <a:rPr lang="de-DE" dirty="0" err="1"/>
-              <a:t>applications</a:t>
-            </a:r>
-            <a:r>
-              <a:rPr lang="de-DE" dirty="0"/>
-              <a:t> (</a:t>
-            </a:r>
-            <a:r>
-              <a:rPr lang="de-DE" dirty="0" err="1"/>
-              <a:t>robotics</a:t>
-            </a:r>
-            <a:r>
-              <a:rPr lang="de-DE" dirty="0"/>
-              <a:t>, </a:t>
-            </a:r>
-            <a:r>
-              <a:rPr lang="de-DE" dirty="0" err="1"/>
-              <a:t>autonomous</a:t>
-            </a:r>
-            <a:r>
-              <a:rPr lang="de-DE" dirty="0"/>
-              <a:t> </a:t>
-            </a:r>
-            <a:r>
-              <a:rPr lang="de-DE" dirty="0" err="1"/>
-              <a:t>driving</a:t>
-            </a:r>
-            <a:r>
-              <a:rPr lang="de-DE" dirty="0"/>
-              <a:t>, </a:t>
-            </a:r>
-            <a:r>
-              <a:rPr lang="de-DE" dirty="0" err="1"/>
-              <a:t>games</a:t>
-            </a:r>
-            <a:r>
-              <a:rPr lang="de-DE" dirty="0"/>
-              <a:t>) </a:t>
-            </a:r>
-            <a:r>
-              <a:rPr lang="de-DE" dirty="0" err="1"/>
-              <a:t>involve</a:t>
-            </a:r>
-            <a:r>
-              <a:rPr lang="de-DE" dirty="0"/>
-              <a:t>:</a:t>
-            </a:r>
-          </a:p>
-          <a:p>
-            <a:pPr lvl="1"/>
-            <a:r>
-              <a:rPr lang="de-DE" dirty="0"/>
-              <a:t>large </a:t>
-            </a:r>
-            <a:r>
-              <a:rPr lang="de-DE" dirty="0" err="1"/>
-              <a:t>state</a:t>
-            </a:r>
-            <a:r>
-              <a:rPr lang="de-DE" dirty="0"/>
-              <a:t>/</a:t>
-            </a:r>
-            <a:r>
-              <a:rPr lang="de-DE" dirty="0" err="1"/>
-              <a:t>action</a:t>
-            </a:r>
-            <a:r>
-              <a:rPr lang="de-DE" dirty="0"/>
-              <a:t> </a:t>
-            </a:r>
-            <a:r>
-              <a:rPr lang="de-DE" dirty="0" err="1"/>
-              <a:t>spaces</a:t>
-            </a:r>
-            <a:endParaRPr lang="de-DE" dirty="0"/>
-          </a:p>
-          <a:p>
-            <a:pPr lvl="1"/>
-            <a:r>
-              <a:rPr lang="de-DE" dirty="0"/>
-              <a:t>partial </a:t>
-            </a:r>
-            <a:r>
-              <a:rPr lang="de-DE" dirty="0" err="1"/>
-              <a:t>observability</a:t>
-            </a:r>
-            <a:endParaRPr lang="de-DE" dirty="0"/>
-          </a:p>
-          <a:p>
-            <a:pPr lvl="1"/>
-            <a:r>
-              <a:rPr lang="de-DE" dirty="0" err="1"/>
-              <a:t>complex</a:t>
-            </a:r>
-            <a:r>
-              <a:rPr lang="de-DE" dirty="0"/>
-              <a:t> </a:t>
-            </a:r>
-            <a:r>
-              <a:rPr lang="de-DE" dirty="0" err="1"/>
-              <a:t>interactions</a:t>
-            </a:r>
-            <a:endParaRPr lang="de-DE" dirty="0"/>
-          </a:p>
-          <a:p>
-            <a:pPr marL="0" indent="0">
-              <a:buNone/>
-            </a:pPr>
-            <a:r>
-              <a:rPr lang="de-DE" dirty="0">
-                <a:sym typeface="Wingdings" pitchFamily="2" charset="2"/>
-              </a:rPr>
-              <a:t> </a:t>
-            </a:r>
-            <a:r>
-              <a:rPr lang="de-DE" dirty="0" err="1">
-                <a:sym typeface="Wingdings" pitchFamily="2" charset="2"/>
-              </a:rPr>
-              <a:t>hard</a:t>
-            </a:r>
-            <a:r>
-              <a:rPr lang="de-DE" dirty="0">
-                <a:sym typeface="Wingdings" pitchFamily="2" charset="2"/>
-              </a:rPr>
-              <a:t> </a:t>
-            </a:r>
-            <a:r>
-              <a:rPr lang="de-DE" dirty="0" err="1">
-                <a:sym typeface="Wingdings" pitchFamily="2" charset="2"/>
-              </a:rPr>
-              <a:t>or</a:t>
-            </a:r>
-            <a:r>
-              <a:rPr lang="de-DE" dirty="0">
-                <a:sym typeface="Wingdings" pitchFamily="2" charset="2"/>
-              </a:rPr>
-              <a:t> </a:t>
-            </a:r>
-            <a:r>
-              <a:rPr lang="de-DE" dirty="0"/>
-              <a:t>impossible </a:t>
-            </a:r>
-            <a:r>
-              <a:rPr lang="de-DE" dirty="0" err="1"/>
-              <a:t>to</a:t>
-            </a:r>
-            <a:r>
-              <a:rPr lang="de-DE" dirty="0"/>
-              <a:t> design classic </a:t>
-            </a:r>
-            <a:r>
-              <a:rPr lang="de-DE" dirty="0" err="1"/>
-              <a:t>controllers</a:t>
-            </a:r>
-            <a:r>
-              <a:rPr lang="de-DE" dirty="0"/>
-              <a:t> </a:t>
-            </a:r>
-            <a:r>
-              <a:rPr lang="de-DE" dirty="0" err="1"/>
-              <a:t>manually</a:t>
-            </a:r>
-            <a:endParaRPr lang="de-DE" dirty="0"/>
-          </a:p>
-        </p:txBody>
-      </p:sp>
-      <p:sp>
-        <p:nvSpPr>
-          <p:cNvPr id="4" name="Foliennummernplatzhalter 3">
-            <a:extLst>
-              <a:ext uri="{FF2B5EF4-FFF2-40B4-BE49-F238E27FC236}">
-                <a16:creationId xmlns:a16="http://schemas.microsoft.com/office/drawing/2014/main" id="{1BBA180D-3B9F-4614-159C-70AB4AE70388}"/>
-              </a:ext>
-            </a:extLst>
-          </p:cNvPr>
-          <p:cNvSpPr>
-            <a:spLocks noGrp="1"/>
-          </p:cNvSpPr>
-          <p:nvPr>
-            <p:ph type="sldNum" sz="quarter" idx="12"/>
-          </p:nvPr>
-        </p:nvSpPr>
-        <p:spPr/>
-        <p:txBody>
-          <a:bodyPr/>
-          <a:lstStyle/>
-          <a:p>
-            <a:fld id="{08C366F5-AFAD-49CB-854A-9D9E238FCA13}" type="slidenum">
-              <a:rPr lang="en-GB" smtClean="0"/>
-              <a:t>5</a:t>
-            </a:fld>
-            <a:endParaRPr lang="en-GB"/>
-          </a:p>
-        </p:txBody>
-      </p:sp>
-    </p:spTree>
-    <p:extLst>
-      <p:ext uri="{BB962C8B-B14F-4D97-AF65-F5344CB8AC3E}">
-        <p14:creationId xmlns:p14="http://schemas.microsoft.com/office/powerpoint/2010/main" val="3821208334"/>
-      </p:ext>
-    </p:extLst>
-  </p:cSld>
-  <p:clrMapOvr>
-    <a:masterClrMapping/>
-  </p:clrMapOvr>
-</p:sld>
-</file>
-
 <file path=ppt/slides/slide6.xml><?xml version="1.0" encoding="utf-8"?>
 <p:sld xmlns:a="http://schemas.openxmlformats.org/drawingml/2006/main" xmlns:r="http://schemas.openxmlformats.org/officeDocument/2006/relationships" xmlns:p="http://schemas.openxmlformats.org/presentationml/2006/main">
   <p:cSld>
@@ -5038,7 +4767,7 @@
           <p:cNvPr id="2" name="Titel 1">
             <a:extLst>
               <a:ext uri="{FF2B5EF4-FFF2-40B4-BE49-F238E27FC236}">
-                <a16:creationId xmlns:a16="http://schemas.microsoft.com/office/drawing/2014/main" id="{71DB5D15-FDA1-DA64-D0FA-F309E4520F4B}"/>
+                <a16:creationId xmlns:a16="http://schemas.microsoft.com/office/drawing/2014/main" id="{D4F7F74A-A7BD-EA84-615A-4CEB235273E4}"/>
               </a:ext>
             </a:extLst>
           </p:cNvPr>
@@ -5056,15 +4785,15 @@
           <a:p>
             <a:r>
               <a:rPr lang="de-DE" dirty="0"/>
-              <a:t>Model </a:t>
-            </a:r>
-            <a:r>
-              <a:rPr lang="de-DE" dirty="0" err="1"/>
-              <a:t>Predictive</a:t>
-            </a:r>
-            <a:r>
-              <a:rPr lang="de-DE" dirty="0"/>
-              <a:t> Control (MPC)</a:t>
+              <a:t>Limits </a:t>
+            </a:r>
+            <a:r>
+              <a:rPr lang="de-DE" dirty="0" err="1"/>
+              <a:t>of</a:t>
+            </a:r>
+            <a:r>
+              <a:rPr lang="de-DE" dirty="0"/>
+              <a:t> Classic Control</a:t>
             </a:r>
           </a:p>
         </p:txBody>
@@ -5074,7 +4803,7 @@
           <p:cNvPr id="3" name="Inhaltsplatzhalter 2">
             <a:extLst>
               <a:ext uri="{FF2B5EF4-FFF2-40B4-BE49-F238E27FC236}">
-                <a16:creationId xmlns:a16="http://schemas.microsoft.com/office/drawing/2014/main" id="{7BAFF50C-1088-19D1-5ABA-8B48151439A8}"/>
+                <a16:creationId xmlns:a16="http://schemas.microsoft.com/office/drawing/2014/main" id="{32324C2D-A5FE-AEF2-73A5-8CFC9C9545F1}"/>
               </a:ext>
             </a:extLst>
           </p:cNvPr>
@@ -5087,247 +4816,270 @@
         </p:nvSpPr>
         <p:spPr/>
         <p:txBody>
-          <a:bodyPr/>
-          <a:lstStyle/>
+          <a:bodyPr>
+            <a:normAutofit fontScale="92500" lnSpcReduction="10000"/>
+          </a:bodyPr>
+          <a:lstStyle/>
+          <a:p>
+            <a:r>
+              <a:rPr lang="de-DE" dirty="0" err="1"/>
+              <a:t>mostly</a:t>
+            </a:r>
+            <a:r>
+              <a:rPr lang="de-DE" dirty="0"/>
+              <a:t> </a:t>
+            </a:r>
+            <a:r>
+              <a:rPr lang="de-DE" dirty="0" err="1"/>
+              <a:t>reactive</a:t>
+            </a:r>
+            <a:r>
+              <a:rPr lang="de-DE" dirty="0"/>
+              <a:t>, </a:t>
+            </a:r>
+            <a:r>
+              <a:rPr lang="de-DE" dirty="0" err="1"/>
+              <a:t>tuned</a:t>
+            </a:r>
+            <a:r>
+              <a:rPr lang="de-DE" dirty="0"/>
+              <a:t> </a:t>
+            </a:r>
+            <a:r>
+              <a:rPr lang="de-DE" dirty="0" err="1"/>
+              <a:t>for</a:t>
+            </a:r>
+            <a:r>
+              <a:rPr lang="de-DE" dirty="0"/>
+              <a:t> simple linear </a:t>
+            </a:r>
+            <a:r>
+              <a:rPr lang="de-DE" dirty="0" err="1"/>
+              <a:t>systems</a:t>
+            </a:r>
+            <a:endParaRPr lang="de-DE" dirty="0"/>
+          </a:p>
+          <a:p>
+            <a:r>
+              <a:rPr lang="de-DE" dirty="0" err="1"/>
+              <a:t>poor</a:t>
+            </a:r>
+            <a:r>
+              <a:rPr lang="de-DE" dirty="0"/>
+              <a:t> </a:t>
+            </a:r>
+            <a:r>
+              <a:rPr lang="de-DE" dirty="0" err="1"/>
+              <a:t>handling</a:t>
+            </a:r>
+            <a:r>
+              <a:rPr lang="de-DE" dirty="0"/>
+              <a:t> </a:t>
+            </a:r>
+            <a:r>
+              <a:rPr lang="de-DE" dirty="0" err="1"/>
+              <a:t>of</a:t>
+            </a:r>
+            <a:r>
+              <a:rPr lang="de-DE" dirty="0"/>
+              <a:t> </a:t>
+            </a:r>
+            <a:r>
+              <a:rPr lang="de-DE" dirty="0" err="1"/>
+              <a:t>constraints</a:t>
+            </a:r>
+            <a:r>
+              <a:rPr lang="de-DE" dirty="0"/>
+              <a:t> and </a:t>
+            </a:r>
+            <a:r>
+              <a:rPr lang="de-DE" dirty="0" err="1"/>
+              <a:t>delays</a:t>
+            </a:r>
+            <a:endParaRPr lang="de-DE" dirty="0"/>
+          </a:p>
+          <a:p>
+            <a:r>
+              <a:rPr lang="de-DE" dirty="0" err="1"/>
+              <a:t>struggles</a:t>
+            </a:r>
+            <a:r>
+              <a:rPr lang="de-DE" dirty="0"/>
+              <a:t> </a:t>
+            </a:r>
+            <a:r>
+              <a:rPr lang="de-DE" dirty="0" err="1"/>
+              <a:t>with</a:t>
+            </a:r>
+            <a:r>
+              <a:rPr lang="de-DE" dirty="0"/>
+              <a:t> high-dimensional, </a:t>
+            </a:r>
+            <a:r>
+              <a:rPr lang="de-DE" dirty="0" err="1"/>
+              <a:t>nonlinear</a:t>
+            </a:r>
+            <a:r>
+              <a:rPr lang="de-DE" dirty="0"/>
+              <a:t>, </a:t>
+            </a:r>
+            <a:r>
+              <a:rPr lang="de-DE" dirty="0" err="1"/>
+              <a:t>or</a:t>
+            </a:r>
+            <a:r>
+              <a:rPr lang="de-DE" dirty="0"/>
+              <a:t> </a:t>
+            </a:r>
+            <a:r>
+              <a:rPr lang="de-DE" dirty="0" err="1"/>
+              <a:t>unstructured</a:t>
+            </a:r>
+            <a:r>
+              <a:rPr lang="de-DE" dirty="0"/>
+              <a:t> </a:t>
+            </a:r>
+            <a:r>
+              <a:rPr lang="de-DE" dirty="0" err="1"/>
+              <a:t>environments</a:t>
+            </a:r>
+            <a:endParaRPr lang="de-DE" dirty="0"/>
+          </a:p>
           <a:p>
             <a:pPr marL="0" indent="0">
               <a:buNone/>
             </a:pPr>
-            <a:r>
-              <a:rPr lang="de-DE" dirty="0"/>
-              <a:t>optimal </a:t>
-            </a:r>
-            <a:r>
-              <a:rPr lang="de-DE" dirty="0" err="1"/>
-              <a:t>control</a:t>
-            </a:r>
-            <a:r>
-              <a:rPr lang="de-DE" dirty="0"/>
-              <a:t> </a:t>
-            </a:r>
-            <a:r>
-              <a:rPr lang="de-DE" dirty="0" err="1"/>
-              <a:t>method</a:t>
+            <a:endParaRPr lang="de-DE" dirty="0">
+              <a:sym typeface="Wingdings" pitchFamily="2" charset="2"/>
+            </a:endParaRPr>
+          </a:p>
+          <a:p>
+            <a:pPr marL="0" indent="0">
+              <a:buNone/>
+            </a:pPr>
+            <a:r>
+              <a:rPr lang="de-DE" dirty="0" err="1">
+                <a:sym typeface="Wingdings" pitchFamily="2" charset="2"/>
+              </a:rPr>
+              <a:t>m</a:t>
+            </a:r>
+            <a:r>
+              <a:rPr lang="de-DE" dirty="0" err="1"/>
+              <a:t>any</a:t>
+            </a:r>
+            <a:r>
+              <a:rPr lang="de-DE" dirty="0"/>
+              <a:t> modern </a:t>
+            </a:r>
+            <a:r>
+              <a:rPr lang="de-DE" dirty="0" err="1"/>
+              <a:t>applications</a:t>
+            </a:r>
+            <a:r>
+              <a:rPr lang="de-DE" dirty="0"/>
+              <a:t> (</a:t>
+            </a:r>
+            <a:r>
+              <a:rPr lang="de-DE" dirty="0" err="1"/>
+              <a:t>robotics</a:t>
+            </a:r>
+            <a:r>
+              <a:rPr lang="de-DE" dirty="0"/>
+              <a:t>, </a:t>
+            </a:r>
+            <a:r>
+              <a:rPr lang="de-DE" dirty="0" err="1"/>
+              <a:t>autonomous</a:t>
+            </a:r>
+            <a:r>
+              <a:rPr lang="de-DE" dirty="0"/>
+              <a:t> </a:t>
+            </a:r>
+            <a:r>
+              <a:rPr lang="de-DE" dirty="0" err="1"/>
+              <a:t>driving</a:t>
+            </a:r>
+            <a:r>
+              <a:rPr lang="de-DE" dirty="0"/>
+              <a:t>, </a:t>
+            </a:r>
+            <a:r>
+              <a:rPr lang="de-DE" dirty="0" err="1"/>
+              <a:t>games</a:t>
+            </a:r>
+            <a:r>
+              <a:rPr lang="de-DE" dirty="0"/>
+              <a:t>) </a:t>
+            </a:r>
+            <a:r>
+              <a:rPr lang="de-DE" dirty="0" err="1"/>
+              <a:t>involve</a:t>
+            </a:r>
+            <a:r>
+              <a:rPr lang="de-DE" dirty="0"/>
+              <a:t>:</a:t>
+            </a:r>
+          </a:p>
+          <a:p>
+            <a:pPr lvl="1"/>
+            <a:r>
+              <a:rPr lang="de-DE" dirty="0"/>
+              <a:t>large </a:t>
+            </a:r>
+            <a:r>
+              <a:rPr lang="de-DE" dirty="0" err="1"/>
+              <a:t>state</a:t>
+            </a:r>
+            <a:r>
+              <a:rPr lang="de-DE" dirty="0"/>
+              <a:t>/</a:t>
+            </a:r>
+            <a:r>
+              <a:rPr lang="de-DE" dirty="0" err="1"/>
+              <a:t>action</a:t>
+            </a:r>
+            <a:r>
+              <a:rPr lang="de-DE" dirty="0"/>
+              <a:t> </a:t>
+            </a:r>
+            <a:r>
+              <a:rPr lang="de-DE" dirty="0" err="1"/>
+              <a:t>spaces</a:t>
             </a:r>
             <a:endParaRPr lang="de-DE" dirty="0"/>
           </a:p>
           <a:p>
+            <a:pPr lvl="1"/>
+            <a:r>
+              <a:rPr lang="de-DE" dirty="0"/>
+              <a:t>partial </a:t>
+            </a:r>
+            <a:r>
+              <a:rPr lang="de-DE" dirty="0" err="1"/>
+              <a:t>observability</a:t>
+            </a:r>
+            <a:endParaRPr lang="de-DE" dirty="0"/>
+          </a:p>
+          <a:p>
+            <a:pPr lvl="1"/>
+            <a:r>
+              <a:rPr lang="de-DE" dirty="0" err="1"/>
+              <a:t>complex</a:t>
+            </a:r>
+            <a:r>
+              <a:rPr lang="de-DE" dirty="0"/>
+              <a:t> </a:t>
+            </a:r>
+            <a:r>
+              <a:rPr lang="de-DE" dirty="0" err="1"/>
+              <a:t>interactions</a:t>
+            </a:r>
+            <a:endParaRPr lang="de-DE" dirty="0"/>
+          </a:p>
+          <a:p>
             <a:pPr marL="0" indent="0">
               <a:buNone/>
             </a:pPr>
-            <a:endParaRPr lang="de-DE" dirty="0"/>
-          </a:p>
-          <a:p>
-            <a:pPr marL="514350" indent="-514350">
-              <a:buFont typeface="+mj-lt"/>
-              <a:buAutoNum type="arabicPeriod"/>
-            </a:pPr>
-            <a:r>
-              <a:rPr lang="de-DE" dirty="0" err="1"/>
-              <a:t>apply</a:t>
-            </a:r>
-            <a:r>
-              <a:rPr lang="de-DE" dirty="0"/>
-              <a:t> a </a:t>
-            </a:r>
-            <a:r>
-              <a:rPr lang="de-DE" dirty="0" err="1"/>
-              <a:t>model</a:t>
-            </a:r>
-            <a:r>
-              <a:rPr lang="de-DE" dirty="0"/>
-              <a:t> </a:t>
-            </a:r>
-            <a:r>
-              <a:rPr lang="de-DE" dirty="0" err="1"/>
-              <a:t>of</a:t>
-            </a:r>
-            <a:r>
-              <a:rPr lang="de-DE" dirty="0"/>
-              <a:t> </a:t>
-            </a:r>
-            <a:r>
-              <a:rPr lang="de-DE" dirty="0" err="1"/>
-              <a:t>the</a:t>
-            </a:r>
-            <a:r>
-              <a:rPr lang="de-DE" dirty="0"/>
-              <a:t> </a:t>
-            </a:r>
-            <a:r>
-              <a:rPr lang="de-DE" dirty="0" err="1"/>
-              <a:t>system</a:t>
-            </a:r>
-            <a:r>
-              <a:rPr lang="de-DE" dirty="0"/>
-              <a:t> </a:t>
-            </a:r>
-            <a:r>
-              <a:rPr lang="de-DE" dirty="0" err="1"/>
-              <a:t>to</a:t>
-            </a:r>
-            <a:r>
-              <a:rPr lang="de-DE" dirty="0"/>
-              <a:t> </a:t>
-            </a:r>
-            <a:r>
-              <a:rPr lang="de-DE" dirty="0" err="1"/>
-              <a:t>predict</a:t>
-            </a:r>
-            <a:r>
-              <a:rPr lang="de-DE" dirty="0"/>
-              <a:t> </a:t>
-            </a:r>
-            <a:r>
-              <a:rPr lang="de-DE" dirty="0" err="1"/>
-              <a:t>future</a:t>
-            </a:r>
-            <a:r>
-              <a:rPr lang="de-DE" dirty="0"/>
-              <a:t> </a:t>
-            </a:r>
-            <a:r>
-              <a:rPr lang="de-DE" dirty="0" err="1"/>
-              <a:t>developments</a:t>
-            </a:r>
-            <a:r>
-              <a:rPr lang="de-DE" dirty="0"/>
-              <a:t> (e.g., differential </a:t>
-            </a:r>
-            <a:r>
-              <a:rPr lang="de-DE" dirty="0" err="1"/>
-              <a:t>equation</a:t>
-            </a:r>
-            <a:r>
-              <a:rPr lang="de-DE" dirty="0"/>
-              <a:t>, but </a:t>
-            </a:r>
-            <a:r>
-              <a:rPr lang="de-DE" dirty="0" err="1"/>
-              <a:t>potentially</a:t>
-            </a:r>
-            <a:r>
-              <a:rPr lang="de-DE" dirty="0"/>
-              <a:t> also </a:t>
-            </a:r>
-            <a:r>
-              <a:rPr lang="de-DE" dirty="0" err="1"/>
-              <a:t>using</a:t>
-            </a:r>
-            <a:r>
-              <a:rPr lang="de-DE" dirty="0"/>
-              <a:t> ML)</a:t>
-            </a:r>
-          </a:p>
-          <a:p>
-            <a:pPr marL="514350" indent="-514350">
-              <a:buFont typeface="+mj-lt"/>
-              <a:buAutoNum type="arabicPeriod"/>
-            </a:pPr>
-            <a:r>
-              <a:rPr lang="de-DE" dirty="0" err="1"/>
-              <a:t>adjust</a:t>
-            </a:r>
-            <a:r>
-              <a:rPr lang="de-DE" dirty="0"/>
-              <a:t> </a:t>
-            </a:r>
-            <a:r>
-              <a:rPr lang="de-DE" dirty="0" err="1"/>
-              <a:t>the</a:t>
-            </a:r>
-            <a:r>
-              <a:rPr lang="de-DE" dirty="0"/>
-              <a:t> </a:t>
-            </a:r>
-            <a:r>
-              <a:rPr lang="de-DE" dirty="0" err="1"/>
-              <a:t>manipulated</a:t>
-            </a:r>
-            <a:r>
-              <a:rPr lang="de-DE" dirty="0"/>
-              <a:t> variable </a:t>
-            </a:r>
-            <a:r>
-              <a:rPr lang="de-DE" dirty="0" err="1"/>
-              <a:t>to</a:t>
-            </a:r>
-            <a:r>
-              <a:rPr lang="de-DE" dirty="0"/>
-              <a:t> </a:t>
-            </a:r>
-            <a:r>
-              <a:rPr lang="de-DE" dirty="0" err="1"/>
-              <a:t>minimize</a:t>
-            </a:r>
-            <a:r>
-              <a:rPr lang="de-DE" dirty="0"/>
-              <a:t> </a:t>
-            </a:r>
-            <a:r>
-              <a:rPr lang="de-DE" dirty="0" err="1"/>
-              <a:t>the</a:t>
-            </a:r>
-            <a:r>
-              <a:rPr lang="de-DE" dirty="0"/>
-              <a:t> </a:t>
-            </a:r>
-            <a:r>
-              <a:rPr lang="de-DE" dirty="0" err="1"/>
-              <a:t>deviation</a:t>
-            </a:r>
-            <a:r>
-              <a:rPr lang="de-DE" dirty="0"/>
-              <a:t> </a:t>
-            </a:r>
-            <a:r>
-              <a:rPr lang="de-DE" dirty="0" err="1"/>
-              <a:t>of</a:t>
-            </a:r>
-            <a:r>
-              <a:rPr lang="de-DE" dirty="0"/>
-              <a:t> </a:t>
-            </a:r>
-            <a:r>
-              <a:rPr lang="de-DE" dirty="0" err="1"/>
-              <a:t>the</a:t>
-            </a:r>
-            <a:r>
-              <a:rPr lang="de-DE" dirty="0"/>
-              <a:t> </a:t>
-            </a:r>
-            <a:r>
-              <a:rPr lang="de-DE" dirty="0" err="1"/>
-              <a:t>controlled</a:t>
-            </a:r>
-            <a:r>
-              <a:rPr lang="de-DE" dirty="0"/>
-              <a:t> variable </a:t>
-            </a:r>
-            <a:r>
-              <a:rPr lang="de-DE" dirty="0" err="1"/>
-              <a:t>over</a:t>
-            </a:r>
-            <a:r>
-              <a:rPr lang="de-DE" dirty="0"/>
-              <a:t> </a:t>
-            </a:r>
-            <a:r>
-              <a:rPr lang="de-DE" dirty="0" err="1"/>
-              <a:t>several</a:t>
-            </a:r>
-            <a:r>
-              <a:rPr lang="de-DE" dirty="0"/>
-              <a:t> </a:t>
-            </a:r>
-            <a:r>
-              <a:rPr lang="de-DE" dirty="0" err="1"/>
-              <a:t>steps</a:t>
-            </a:r>
-            <a:r>
-              <a:rPr lang="de-DE" dirty="0"/>
-              <a:t> </a:t>
-            </a:r>
             <a:r>
               <a:rPr lang="de-DE" dirty="0">
                 <a:sym typeface="Wingdings" pitchFamily="2" charset="2"/>
@@ -5338,85 +5090,52 @@
               <a:rPr lang="de-DE" dirty="0" err="1">
                 <a:sym typeface="Wingdings" pitchFamily="2" charset="2"/>
               </a:rPr>
-              <a:t>optimization</a:t>
+              <a:t>hard</a:t>
+            </a:r>
+            <a:r>
+              <a:rPr lang="de-DE" dirty="0">
+                <a:sym typeface="Wingdings" pitchFamily="2" charset="2"/>
+              </a:rPr>
+              <a:t> </a:t>
+            </a:r>
+            <a:r>
+              <a:rPr lang="de-DE" dirty="0" err="1">
+                <a:sym typeface="Wingdings" pitchFamily="2" charset="2"/>
+              </a:rPr>
+              <a:t>or</a:t>
+            </a:r>
+            <a:r>
+              <a:rPr lang="de-DE" dirty="0">
+                <a:sym typeface="Wingdings" pitchFamily="2" charset="2"/>
+              </a:rPr>
+              <a:t> </a:t>
+            </a:r>
+            <a:r>
+              <a:rPr lang="de-DE" dirty="0"/>
+              <a:t>impossible </a:t>
+            </a:r>
+            <a:r>
+              <a:rPr lang="de-DE" dirty="0" err="1"/>
+              <a:t>to</a:t>
+            </a:r>
+            <a:r>
+              <a:rPr lang="de-DE" dirty="0"/>
+              <a:t> design classic </a:t>
+            </a:r>
+            <a:r>
+              <a:rPr lang="de-DE" dirty="0" err="1"/>
+              <a:t>controllers</a:t>
+            </a:r>
+            <a:r>
+              <a:rPr lang="de-DE" dirty="0"/>
+              <a:t> </a:t>
+            </a:r>
+            <a:r>
+              <a:rPr lang="de-DE" dirty="0" err="1"/>
+              <a:t>manually</a:t>
             </a:r>
             <a:endParaRPr lang="de-DE" dirty="0"/>
           </a:p>
-          <a:p>
-            <a:pPr marL="514350" indent="-514350">
-              <a:buFont typeface="+mj-lt"/>
-              <a:buAutoNum type="arabicPeriod"/>
-            </a:pPr>
-            <a:r>
-              <a:rPr lang="de-DE" dirty="0" err="1"/>
-              <a:t>execute</a:t>
-            </a:r>
-            <a:r>
-              <a:rPr lang="de-DE" dirty="0"/>
-              <a:t> </a:t>
-            </a:r>
-            <a:r>
-              <a:rPr lang="de-DE" dirty="0" err="1"/>
-              <a:t>only</a:t>
-            </a:r>
-            <a:r>
-              <a:rPr lang="de-DE" dirty="0"/>
-              <a:t> </a:t>
-            </a:r>
-            <a:r>
-              <a:rPr lang="de-DE" dirty="0" err="1"/>
-              <a:t>the</a:t>
-            </a:r>
-            <a:r>
-              <a:rPr lang="de-DE" dirty="0"/>
-              <a:t> </a:t>
-            </a:r>
-            <a:r>
-              <a:rPr lang="de-DE" dirty="0" err="1"/>
-              <a:t>first</a:t>
-            </a:r>
-            <a:r>
-              <a:rPr lang="de-DE" dirty="0"/>
-              <a:t> </a:t>
-            </a:r>
-            <a:r>
-              <a:rPr lang="de-DE" dirty="0" err="1"/>
-              <a:t>step</a:t>
-            </a:r>
-            <a:r>
-              <a:rPr lang="de-DE" dirty="0"/>
-              <a:t>, </a:t>
-            </a:r>
-            <a:r>
-              <a:rPr lang="de-DE" dirty="0" err="1"/>
-              <a:t>then</a:t>
-            </a:r>
-            <a:r>
-              <a:rPr lang="de-DE" dirty="0"/>
-              <a:t> </a:t>
-            </a:r>
-            <a:r>
-              <a:rPr lang="de-DE" dirty="0" err="1"/>
-              <a:t>repeat</a:t>
-            </a:r>
-            <a:r>
-              <a:rPr lang="de-DE" dirty="0"/>
-              <a:t> </a:t>
-            </a:r>
-            <a:r>
-              <a:rPr lang="de-DE" dirty="0" err="1"/>
-              <a:t>the</a:t>
-            </a:r>
-            <a:r>
-              <a:rPr lang="de-DE" dirty="0"/>
-              <a:t> </a:t>
-            </a:r>
-            <a:r>
-              <a:rPr lang="de-DE" dirty="0" err="1"/>
-              <a:t>process</a:t>
-            </a:r>
-            <a:endParaRPr lang="de-DE" dirty="0"/>
-          </a:p>
         </p:txBody>
       </p:sp>
       <p:sp>
@@ -5424,7 +5143,7 @@
           <p:cNvPr id="4" name="Foliennummernplatzhalter 3">
             <a:extLst>
               <a:ext uri="{FF2B5EF4-FFF2-40B4-BE49-F238E27FC236}">
-                <a16:creationId xmlns:a16="http://schemas.microsoft.com/office/drawing/2014/main" id="{54E5F438-5CB6-0858-695A-E6AB766C0DB8}"/>
+                <a16:creationId xmlns:a16="http://schemas.microsoft.com/office/drawing/2014/main" id="{1BBA180D-3B9F-4614-159C-70AB4AE70388}"/>
               </a:ext>
             </a:extLst>
           </p:cNvPr>
@@ -5448,86 +5167,10 @@
           </a:p>
         </p:txBody>
       </p:sp>
-      <p:sp>
-        <p:nvSpPr>
-          <p:cNvPr id="6" name="Textfeld 5">
-            <a:extLst>
-              <a:ext uri="{FF2B5EF4-FFF2-40B4-BE49-F238E27FC236}">
-                <a16:creationId xmlns:a16="http://schemas.microsoft.com/office/drawing/2014/main" id="{D6597E99-7CDB-DB1E-48AF-FBE2CC90D117}"/>
-              </a:ext>
-            </a:extLst>
-          </p:cNvPr>
-          <p:cNvSpPr txBox="1"/>
-          <p:nvPr/>
-        </p:nvSpPr>
-        <p:spPr>
-          <a:xfrm>
-            <a:off x="3774567" y="5788680"/>
-            <a:ext cx="4642866" cy="523220"/>
-          </a:xfrm>
-          <a:prstGeom prst="rect">
-            <a:avLst/>
-          </a:prstGeom>
-          <a:noFill/>
-          <a:ln>
-            <a:solidFill>
-              <a:schemeClr val="tx1"/>
-            </a:solidFill>
-          </a:ln>
-        </p:spPr>
-        <p:txBody>
-          <a:bodyPr wrap="square">
-            <a:spAutoFit/>
-          </a:bodyPr>
-          <a:lstStyle/>
-          <a:p>
-            <a:pPr marL="0" indent="0">
-              <a:buNone/>
-            </a:pPr>
-            <a:r>
-              <a:rPr lang="de-DE" sz="2800" dirty="0" err="1"/>
-              <a:t>requires</a:t>
-            </a:r>
-            <a:r>
-              <a:rPr lang="de-DE" sz="2800" dirty="0"/>
-              <a:t> </a:t>
-            </a:r>
-            <a:r>
-              <a:rPr lang="de-DE" sz="2800" dirty="0" err="1"/>
-              <a:t>model</a:t>
-            </a:r>
-            <a:r>
-              <a:rPr lang="de-DE" sz="2800" dirty="0"/>
-              <a:t> </a:t>
-            </a:r>
-            <a:r>
-              <a:rPr lang="de-DE" sz="2800" dirty="0" err="1"/>
-              <a:t>of</a:t>
-            </a:r>
-            <a:r>
-              <a:rPr lang="de-DE" sz="2800" dirty="0"/>
-              <a:t> </a:t>
-            </a:r>
-            <a:r>
-              <a:rPr lang="de-DE" sz="2800" dirty="0" err="1"/>
-              <a:t>the</a:t>
-            </a:r>
-            <a:r>
-              <a:rPr lang="de-DE" sz="2800" dirty="0"/>
-              <a:t> </a:t>
-            </a:r>
-            <a:r>
-              <a:rPr lang="de-DE" sz="2800" dirty="0" err="1"/>
-              <a:t>system</a:t>
-            </a:r>
-            <a:endParaRPr lang="de-DE" sz="2800" dirty="0"/>
-          </a:p>
-        </p:txBody>
-      </p:sp>
     </p:spTree>
     <p:extLst>
       <p:ext uri="{BB962C8B-B14F-4D97-AF65-F5344CB8AC3E}">
-        <p14:creationId xmlns:p14="http://schemas.microsoft.com/office/powerpoint/2010/main" val="1982465593"/>
+        <p14:creationId xmlns:p14="http://schemas.microsoft.com/office/powerpoint/2010/main" val="3821208334"/>
       </p:ext>
     </p:extLst>
   </p:cSld>
@@ -5559,7 +5202,7 @@
           <p:cNvPr id="2" name="Titel 1">
             <a:extLst>
               <a:ext uri="{FF2B5EF4-FFF2-40B4-BE49-F238E27FC236}">
-                <a16:creationId xmlns:a16="http://schemas.microsoft.com/office/drawing/2014/main" id="{3B8A2272-09A0-29C7-D5BB-316D88A76133}"/>
+                <a16:creationId xmlns:a16="http://schemas.microsoft.com/office/drawing/2014/main" id="{71DB5D15-FDA1-DA64-D0FA-F309E4520F4B}"/>
               </a:ext>
             </a:extLst>
           </p:cNvPr>
@@ -5577,23 +5220,15 @@
           <a:p>
             <a:r>
               <a:rPr lang="de-DE" dirty="0"/>
-              <a:t>Model-Free </a:t>
-            </a:r>
-            <a:r>
-              <a:rPr lang="de-DE" dirty="0" err="1"/>
-              <a:t>vs</a:t>
-            </a:r>
-            <a:r>
-              <a:rPr lang="de-DE" dirty="0"/>
-              <a:t> Model-</a:t>
-            </a:r>
-            <a:r>
-              <a:rPr lang="de-DE" dirty="0" err="1"/>
-              <a:t>Based</a:t>
-            </a:r>
-            <a:r>
-              <a:rPr lang="de-DE" dirty="0"/>
-              <a:t> Control</a:t>
+              <a:t>Model </a:t>
+            </a:r>
+            <a:r>
+              <a:rPr lang="de-DE" dirty="0" err="1"/>
+              <a:t>Predictive</a:t>
+            </a:r>
+            <a:r>
+              <a:rPr lang="de-DE" dirty="0"/>
+              <a:t> Control (MPC)</a:t>
             </a:r>
           </a:p>
         </p:txBody>
@@ -5603,7 +5238,7 @@
           <p:cNvPr id="3" name="Inhaltsplatzhalter 2">
             <a:extLst>
               <a:ext uri="{FF2B5EF4-FFF2-40B4-BE49-F238E27FC236}">
-                <a16:creationId xmlns:a16="http://schemas.microsoft.com/office/drawing/2014/main" id="{532AFCA5-C3C8-DCB7-30F6-67F9812C7042}"/>
+                <a16:creationId xmlns:a16="http://schemas.microsoft.com/office/drawing/2014/main" id="{7BAFF50C-1088-19D1-5ABA-8B48151439A8}"/>
               </a:ext>
             </a:extLst>
           </p:cNvPr>
@@ -5616,22 +5251,15 @@
         </p:nvSpPr>
         <p:spPr/>
         <p:txBody>
-          <a:bodyPr>
-            <a:normAutofit lnSpcReduction="10000"/>
-          </a:bodyPr>
-          <a:lstStyle/>
-          <a:p>
-            <a:r>
-              <a:rPr lang="de-DE" dirty="0"/>
-              <a:t>model-</a:t>
-            </a:r>
-            <a:r>
-              <a:rPr lang="de-DE" dirty="0" err="1"/>
-              <a:t>based</a:t>
-            </a:r>
-            <a:r>
-              <a:rPr lang="de-DE" dirty="0"/>
-              <a:t> </a:t>
+          <a:bodyPr/>
+          <a:lstStyle/>
+          <a:p>
+            <a:pPr marL="0" indent="0">
+              <a:buNone/>
+            </a:pPr>
+            <a:r>
+              <a:rPr lang="de-DE" dirty="0"/>
+              <a:t>optimal </a:t>
             </a:r>
             <a:r>
               <a:rPr lang="de-DE" dirty="0" err="1"/>
@@ -5639,11 +5267,28 @@
             </a:r>
             <a:r>
               <a:rPr lang="de-DE" dirty="0"/>
-              <a:t> (MPC): </a:t>
-            </a:r>
-            <a:r>
-              <a:rPr lang="de-DE" dirty="0" err="1"/>
-              <a:t>uses</a:t>
+              <a:t> </a:t>
+            </a:r>
+            <a:r>
+              <a:rPr lang="de-DE" dirty="0" err="1"/>
+              <a:t>method</a:t>
+            </a:r>
+            <a:endParaRPr lang="de-DE" dirty="0"/>
+          </a:p>
+          <a:p>
+            <a:pPr marL="0" indent="0">
+              <a:buNone/>
+            </a:pPr>
+            <a:endParaRPr lang="de-DE" dirty="0"/>
+          </a:p>
+          <a:p>
+            <a:pPr marL="514350" indent="-514350">
+              <a:buFont typeface="+mj-lt"/>
+              <a:buAutoNum type="arabicPeriod"/>
+            </a:pPr>
+            <a:r>
+              <a:rPr lang="de-DE" dirty="0" err="1"/>
+              <a:t>apply</a:t>
             </a:r>
             <a:r>
               <a:rPr lang="de-DE" dirty="0"/>
@@ -5651,6 +5296,30 @@
             </a:r>
             <a:r>
               <a:rPr lang="de-DE" dirty="0" err="1"/>
+              <a:t>model</a:t>
+            </a:r>
+            <a:r>
+              <a:rPr lang="de-DE" dirty="0"/>
+              <a:t> </a:t>
+            </a:r>
+            <a:r>
+              <a:rPr lang="de-DE" dirty="0" err="1"/>
+              <a:t>of</a:t>
+            </a:r>
+            <a:r>
+              <a:rPr lang="de-DE" dirty="0"/>
+              <a:t> </a:t>
+            </a:r>
+            <a:r>
+              <a:rPr lang="de-DE" dirty="0" err="1"/>
+              <a:t>the</a:t>
+            </a:r>
+            <a:r>
+              <a:rPr lang="de-DE" dirty="0"/>
+              <a:t> </a:t>
+            </a:r>
+            <a:r>
+              <a:rPr lang="de-DE" dirty="0" err="1"/>
               <a:t>system</a:t>
             </a:r>
             <a:r>
@@ -5659,106 +5328,165 @@
             </a:r>
             <a:r>
               <a:rPr lang="de-DE" dirty="0" err="1"/>
-              <a:t>model</a:t>
-            </a:r>
-            <a:r>
-              <a:rPr lang="de-DE" dirty="0"/>
-              <a:t> </a:t>
-            </a:r>
-            <a:r>
-              <a:rPr lang="de-DE" dirty="0" err="1"/>
               <a:t>to</a:t>
             </a:r>
             <a:r>
               <a:rPr lang="de-DE" dirty="0"/>
-              <a:t> plan </a:t>
-            </a:r>
-            <a:r>
-              <a:rPr lang="de-DE" dirty="0" err="1"/>
-              <a:t>or</a:t>
-            </a:r>
-            <a:r>
-              <a:rPr lang="de-DE" dirty="0"/>
-              <a:t> </a:t>
-            </a:r>
-            <a:r>
-              <a:rPr lang="de-DE" dirty="0" err="1"/>
-              <a:t>optimize</a:t>
-            </a:r>
-            <a:r>
-              <a:rPr lang="de-DE" dirty="0"/>
-              <a:t> </a:t>
-            </a:r>
-            <a:r>
-              <a:rPr lang="de-DE" dirty="0" err="1"/>
-              <a:t>actions</a:t>
-            </a:r>
-            <a:endParaRPr lang="de-DE" dirty="0"/>
-          </a:p>
-          <a:p>
-            <a:r>
-              <a:rPr lang="de-DE" dirty="0"/>
-              <a:t>model-</a:t>
-            </a:r>
-            <a:r>
-              <a:rPr lang="de-DE" dirty="0" err="1"/>
-              <a:t>free</a:t>
-            </a:r>
-            <a:r>
-              <a:rPr lang="de-DE" dirty="0"/>
-              <a:t> </a:t>
-            </a:r>
-            <a:r>
-              <a:rPr lang="de-DE" dirty="0" err="1"/>
-              <a:t>reinforcement</a:t>
-            </a:r>
-            <a:r>
-              <a:rPr lang="de-DE" dirty="0"/>
-              <a:t> </a:t>
-            </a:r>
-            <a:r>
-              <a:rPr lang="de-DE" dirty="0" err="1"/>
-              <a:t>learning</a:t>
-            </a:r>
-            <a:r>
-              <a:rPr lang="de-DE" dirty="0"/>
-              <a:t> (RL): </a:t>
-            </a:r>
-            <a:r>
-              <a:rPr lang="de-DE" dirty="0" err="1"/>
-              <a:t>learns</a:t>
-            </a:r>
-            <a:r>
-              <a:rPr lang="de-DE" dirty="0"/>
-              <a:t> </a:t>
-            </a:r>
-            <a:r>
-              <a:rPr lang="de-DE" dirty="0" err="1"/>
-              <a:t>control</a:t>
-            </a:r>
-            <a:r>
-              <a:rPr lang="de-DE" dirty="0"/>
-              <a:t> </a:t>
-            </a:r>
-            <a:r>
-              <a:rPr lang="de-DE" dirty="0" err="1"/>
-              <a:t>directly</a:t>
-            </a:r>
-            <a:r>
-              <a:rPr lang="de-DE" dirty="0"/>
-              <a:t> </a:t>
-            </a:r>
-            <a:r>
-              <a:rPr lang="de-DE" dirty="0" err="1"/>
-              <a:t>from</a:t>
-            </a:r>
-            <a:r>
-              <a:rPr lang="de-DE" dirty="0"/>
-              <a:t> </a:t>
-            </a:r>
-            <a:r>
-              <a:rPr lang="de-DE" dirty="0" err="1"/>
-              <a:t>interaction</a:t>
+              <a:t> </a:t>
+            </a:r>
+            <a:r>
+              <a:rPr lang="de-DE" dirty="0" err="1"/>
+              <a:t>predict</a:t>
+            </a:r>
+            <a:r>
+              <a:rPr lang="de-DE" dirty="0"/>
+              <a:t> </a:t>
+            </a:r>
+            <a:r>
+              <a:rPr lang="de-DE" dirty="0" err="1"/>
+              <a:t>future</a:t>
+            </a:r>
+            <a:r>
+              <a:rPr lang="de-DE" dirty="0"/>
+              <a:t> </a:t>
+            </a:r>
+            <a:r>
+              <a:rPr lang="de-DE" dirty="0" err="1"/>
+              <a:t>developments</a:t>
+            </a:r>
+            <a:r>
+              <a:rPr lang="de-DE" dirty="0"/>
+              <a:t> (e.g., differential </a:t>
+            </a:r>
+            <a:r>
+              <a:rPr lang="de-DE" dirty="0" err="1"/>
+              <a:t>equation</a:t>
+            </a:r>
+            <a:r>
+              <a:rPr lang="de-DE" dirty="0"/>
+              <a:t>, but </a:t>
+            </a:r>
+            <a:r>
+              <a:rPr lang="de-DE" dirty="0" err="1"/>
+              <a:t>potentially</a:t>
+            </a:r>
+            <a:r>
+              <a:rPr lang="de-DE" dirty="0"/>
+              <a:t> also </a:t>
+            </a:r>
+            <a:r>
+              <a:rPr lang="de-DE" dirty="0" err="1"/>
+              <a:t>using</a:t>
+            </a:r>
+            <a:r>
+              <a:rPr lang="de-DE" dirty="0"/>
+              <a:t> ML)</a:t>
+            </a:r>
+          </a:p>
+          <a:p>
+            <a:pPr marL="514350" indent="-514350">
+              <a:buFont typeface="+mj-lt"/>
+              <a:buAutoNum type="arabicPeriod"/>
+            </a:pPr>
+            <a:r>
+              <a:rPr lang="de-DE" dirty="0" err="1"/>
+              <a:t>adjust</a:t>
+            </a:r>
+            <a:r>
+              <a:rPr lang="de-DE" dirty="0"/>
+              <a:t> </a:t>
+            </a:r>
+            <a:r>
+              <a:rPr lang="de-DE" dirty="0" err="1"/>
+              <a:t>the</a:t>
+            </a:r>
+            <a:r>
+              <a:rPr lang="de-DE" dirty="0"/>
+              <a:t> </a:t>
+            </a:r>
+            <a:r>
+              <a:rPr lang="de-DE" dirty="0" err="1"/>
+              <a:t>manipulated</a:t>
+            </a:r>
+            <a:r>
+              <a:rPr lang="de-DE" dirty="0"/>
+              <a:t> variable </a:t>
+            </a:r>
+            <a:r>
+              <a:rPr lang="de-DE" dirty="0" err="1"/>
+              <a:t>to</a:t>
+            </a:r>
+            <a:r>
+              <a:rPr lang="de-DE" dirty="0"/>
+              <a:t> </a:t>
+            </a:r>
+            <a:r>
+              <a:rPr lang="de-DE" dirty="0" err="1"/>
+              <a:t>minimize</a:t>
+            </a:r>
+            <a:r>
+              <a:rPr lang="de-DE" dirty="0"/>
+              <a:t> </a:t>
+            </a:r>
+            <a:r>
+              <a:rPr lang="de-DE" dirty="0" err="1"/>
+              <a:t>the</a:t>
+            </a:r>
+            <a:r>
+              <a:rPr lang="de-DE" dirty="0"/>
+              <a:t> </a:t>
+            </a:r>
+            <a:r>
+              <a:rPr lang="de-DE" dirty="0" err="1"/>
+              <a:t>deviation</a:t>
+            </a:r>
+            <a:r>
+              <a:rPr lang="de-DE" dirty="0"/>
+              <a:t> </a:t>
+            </a:r>
+            <a:r>
+              <a:rPr lang="de-DE" dirty="0" err="1"/>
+              <a:t>of</a:t>
+            </a:r>
+            <a:r>
+              <a:rPr lang="de-DE" dirty="0"/>
+              <a:t> </a:t>
+            </a:r>
+            <a:r>
+              <a:rPr lang="de-DE" dirty="0" err="1"/>
+              <a:t>the</a:t>
+            </a:r>
+            <a:r>
+              <a:rPr lang="de-DE" dirty="0"/>
+              <a:t> </a:t>
+            </a:r>
+            <a:r>
+              <a:rPr lang="de-DE" dirty="0" err="1"/>
+              <a:t>controlled</a:t>
+            </a:r>
+            <a:r>
+              <a:rPr lang="de-DE" dirty="0"/>
+              <a:t> variable </a:t>
+            </a:r>
+            <a:r>
+              <a:rPr lang="de-DE" dirty="0" err="1"/>
+              <a:t>over</a:t>
+            </a:r>
+            <a:r>
+              <a:rPr lang="de-DE" dirty="0"/>
+              <a:t> </a:t>
+            </a:r>
+            <a:r>
+              <a:rPr lang="de-DE" dirty="0" err="1"/>
+              <a:t>several</a:t>
+            </a:r>
+            <a:r>
+              <a:rPr lang="de-DE" dirty="0"/>
+              <a:t> </a:t>
+            </a:r>
+            <a:r>
+              <a:rPr lang="de-DE" dirty="0" err="1"/>
+              <a:t>steps</a:t>
             </a:r>
             <a:r>
               <a:rPr lang="de-DE" dirty="0"/>
@@ -5768,175 +5496,91 @@
               <a:rPr lang="de-DE" dirty="0">
                 <a:sym typeface="Wingdings" pitchFamily="2" charset="2"/>
               </a:rPr>
-              <a:t></a:t>
-            </a:r>
-            <a:r>
-              <a:rPr lang="de-DE" dirty="0"/>
-              <a:t> </a:t>
-            </a:r>
-            <a:r>
-              <a:rPr lang="de-DE" dirty="0" err="1"/>
-              <a:t>no</a:t>
-            </a:r>
-            <a:r>
-              <a:rPr lang="de-DE" dirty="0"/>
-              <a:t> explicit </a:t>
-            </a:r>
-            <a:r>
-              <a:rPr lang="de-DE" dirty="0" err="1"/>
-              <a:t>system</a:t>
-            </a:r>
-            <a:r>
-              <a:rPr lang="de-DE" dirty="0"/>
-              <a:t> </a:t>
-            </a:r>
-            <a:r>
-              <a:rPr lang="de-DE" dirty="0" err="1"/>
-              <a:t>model</a:t>
-            </a:r>
-            <a:r>
-              <a:rPr lang="de-DE" dirty="0"/>
-              <a:t> </a:t>
-            </a:r>
-            <a:r>
-              <a:rPr lang="de-DE" dirty="0" err="1"/>
-              <a:t>needed</a:t>
+              <a:t> </a:t>
+            </a:r>
+            <a:r>
+              <a:rPr lang="de-DE" dirty="0" err="1">
+                <a:sym typeface="Wingdings" pitchFamily="2" charset="2"/>
+              </a:rPr>
+              <a:t>optimization</a:t>
             </a:r>
             <a:endParaRPr lang="de-DE" dirty="0"/>
           </a:p>
           <a:p>
-            <a:pPr marL="0" indent="0">
-              <a:buNone/>
+            <a:pPr marL="514350" indent="-514350">
+              <a:buFont typeface="+mj-lt"/>
+              <a:buAutoNum type="arabicPeriod"/>
             </a:pPr>
+            <a:r>
+              <a:rPr lang="de-DE" dirty="0" err="1"/>
+              <a:t>execute</a:t>
+            </a:r>
+            <a:r>
+              <a:rPr lang="de-DE" dirty="0"/>
+              <a:t> </a:t>
+            </a:r>
+            <a:r>
+              <a:rPr lang="de-DE" dirty="0" err="1"/>
+              <a:t>only</a:t>
+            </a:r>
+            <a:r>
+              <a:rPr lang="de-DE" dirty="0"/>
+              <a:t> </a:t>
+            </a:r>
+            <a:r>
+              <a:rPr lang="de-DE" dirty="0" err="1"/>
+              <a:t>the</a:t>
+            </a:r>
+            <a:r>
+              <a:rPr lang="de-DE" dirty="0"/>
+              <a:t> </a:t>
+            </a:r>
+            <a:r>
+              <a:rPr lang="de-DE" dirty="0" err="1"/>
+              <a:t>first</a:t>
+            </a:r>
+            <a:r>
+              <a:rPr lang="de-DE" dirty="0"/>
+              <a:t> </a:t>
+            </a:r>
+            <a:r>
+              <a:rPr lang="de-DE" dirty="0" err="1"/>
+              <a:t>step</a:t>
+            </a:r>
+            <a:r>
+              <a:rPr lang="de-DE" dirty="0"/>
+              <a:t>, </a:t>
+            </a:r>
+            <a:r>
+              <a:rPr lang="de-DE" dirty="0" err="1"/>
+              <a:t>then</a:t>
+            </a:r>
+            <a:r>
+              <a:rPr lang="de-DE" dirty="0"/>
+              <a:t> </a:t>
+            </a:r>
+            <a:r>
+              <a:rPr lang="de-DE" dirty="0" err="1"/>
+              <a:t>repeat</a:t>
+            </a:r>
+            <a:r>
+              <a:rPr lang="de-DE" dirty="0"/>
+              <a:t> </a:t>
+            </a:r>
+            <a:r>
+              <a:rPr lang="de-DE" dirty="0" err="1"/>
+              <a:t>the</a:t>
+            </a:r>
+            <a:r>
+              <a:rPr lang="de-DE" dirty="0"/>
+              <a:t> </a:t>
+            </a:r>
+            <a:r>
+              <a:rPr lang="de-DE" dirty="0" err="1"/>
+              <a:t>process</a:t>
+            </a:r>
             <a:endParaRPr lang="de-DE" dirty="0"/>
           </a:p>
-          <a:p>
-            <a:pPr marL="0" indent="0">
-              <a:buNone/>
-            </a:pPr>
-            <a:r>
-              <a:rPr lang="de-DE" dirty="0"/>
-              <a:t>trade-off:</a:t>
-            </a:r>
-          </a:p>
-          <a:p>
-            <a:r>
-              <a:rPr lang="de-DE" dirty="0"/>
-              <a:t>model-</a:t>
-            </a:r>
-            <a:r>
-              <a:rPr lang="de-DE" dirty="0" err="1"/>
-              <a:t>based</a:t>
-            </a:r>
-            <a:r>
-              <a:rPr lang="de-DE" dirty="0"/>
-              <a:t>: sample </a:t>
-            </a:r>
-            <a:r>
-              <a:rPr lang="de-DE" dirty="0" err="1"/>
-              <a:t>efficient</a:t>
-            </a:r>
-            <a:r>
-              <a:rPr lang="de-DE" dirty="0"/>
-              <a:t>, </a:t>
-            </a:r>
-            <a:r>
-              <a:rPr lang="de-DE" dirty="0" err="1"/>
-              <a:t>predictive</a:t>
-            </a:r>
-            <a:r>
-              <a:rPr lang="de-DE" dirty="0"/>
-              <a:t>, </a:t>
-            </a:r>
-            <a:r>
-              <a:rPr lang="de-DE" dirty="0" err="1"/>
-              <a:t>naturally</a:t>
-            </a:r>
-            <a:r>
-              <a:rPr lang="de-DE" dirty="0"/>
-              <a:t> </a:t>
-            </a:r>
-            <a:r>
-              <a:rPr lang="de-DE" dirty="0" err="1"/>
-              <a:t>handles</a:t>
-            </a:r>
-            <a:r>
-              <a:rPr lang="de-DE" dirty="0"/>
-              <a:t> </a:t>
-            </a:r>
-            <a:r>
-              <a:rPr lang="de-DE" dirty="0" err="1"/>
-              <a:t>constraints</a:t>
-            </a:r>
-            <a:endParaRPr lang="de-DE" dirty="0"/>
-          </a:p>
-          <a:p>
-            <a:r>
-              <a:rPr lang="de-DE" dirty="0"/>
-              <a:t>model-</a:t>
-            </a:r>
-            <a:r>
-              <a:rPr lang="de-DE" dirty="0" err="1"/>
-              <a:t>free</a:t>
-            </a:r>
-            <a:r>
-              <a:rPr lang="de-DE" dirty="0"/>
-              <a:t>: flexible, </a:t>
-            </a:r>
-            <a:r>
-              <a:rPr lang="de-DE" dirty="0" err="1"/>
-              <a:t>works</a:t>
-            </a:r>
-            <a:r>
-              <a:rPr lang="de-DE" dirty="0"/>
-              <a:t> </a:t>
-            </a:r>
-            <a:r>
-              <a:rPr lang="de-DE" dirty="0" err="1"/>
-              <a:t>with</a:t>
-            </a:r>
-            <a:r>
-              <a:rPr lang="de-DE" dirty="0"/>
-              <a:t> </a:t>
-            </a:r>
-            <a:r>
-              <a:rPr lang="de-DE" dirty="0" err="1"/>
-              <a:t>unknown</a:t>
-            </a:r>
-            <a:r>
-              <a:rPr lang="de-DE" dirty="0"/>
-              <a:t> </a:t>
-            </a:r>
-            <a:r>
-              <a:rPr lang="de-DE" dirty="0" err="1"/>
-              <a:t>dynamics</a:t>
-            </a:r>
-            <a:r>
-              <a:rPr lang="de-DE" dirty="0"/>
-              <a:t>, </a:t>
-            </a:r>
-            <a:r>
-              <a:rPr lang="de-DE" dirty="0" err="1"/>
-              <a:t>maximizes</a:t>
-            </a:r>
-            <a:r>
-              <a:rPr lang="de-DE" dirty="0"/>
-              <a:t> </a:t>
-            </a:r>
-            <a:r>
-              <a:rPr lang="de-DE" dirty="0" err="1"/>
-              <a:t>long</a:t>
-            </a:r>
-            <a:r>
-              <a:rPr lang="de-DE" dirty="0"/>
-              <a:t>-term </a:t>
-            </a:r>
-            <a:r>
-              <a:rPr lang="de-DE" dirty="0" err="1"/>
-              <a:t>reward</a:t>
-            </a:r>
-            <a:endParaRPr lang="de-DE" dirty="0"/>
-          </a:p>
         </p:txBody>
       </p:sp>
       <p:sp>
@@ -5944,7 +5588,7 @@
           <p:cNvPr id="4" name="Foliennummernplatzhalter 3">
             <a:extLst>
               <a:ext uri="{FF2B5EF4-FFF2-40B4-BE49-F238E27FC236}">
-                <a16:creationId xmlns:a16="http://schemas.microsoft.com/office/drawing/2014/main" id="{2807D302-1C4F-333A-A8C7-609A4212E029}"/>
+                <a16:creationId xmlns:a16="http://schemas.microsoft.com/office/drawing/2014/main" id="{54E5F438-5CB6-0858-695A-E6AB766C0DB8}"/>
               </a:ext>
             </a:extLst>
           </p:cNvPr>
@@ -5968,10 +5612,86 @@
           </a:p>
         </p:txBody>
       </p:sp>
+      <p:sp>
+        <p:nvSpPr>
+          <p:cNvPr id="6" name="Textfeld 5">
+            <a:extLst>
+              <a:ext uri="{FF2B5EF4-FFF2-40B4-BE49-F238E27FC236}">
+                <a16:creationId xmlns:a16="http://schemas.microsoft.com/office/drawing/2014/main" id="{D6597E99-7CDB-DB1E-48AF-FBE2CC90D117}"/>
+              </a:ext>
+            </a:extLst>
+          </p:cNvPr>
+          <p:cNvSpPr txBox="1"/>
+          <p:nvPr/>
+        </p:nvSpPr>
+        <p:spPr>
+          <a:xfrm>
+            <a:off x="3774567" y="5788680"/>
+            <a:ext cx="4642866" cy="523220"/>
+          </a:xfrm>
+          <a:prstGeom prst="rect">
+            <a:avLst/>
+          </a:prstGeom>
+          <a:noFill/>
+          <a:ln>
+            <a:solidFill>
+              <a:schemeClr val="tx1"/>
+            </a:solidFill>
+          </a:ln>
+        </p:spPr>
+        <p:txBody>
+          <a:bodyPr wrap="square">
+            <a:spAutoFit/>
+          </a:bodyPr>
+          <a:lstStyle/>
+          <a:p>
+            <a:pPr marL="0" indent="0">
+              <a:buNone/>
+            </a:pPr>
+            <a:r>
+              <a:rPr lang="de-DE" sz="2800" dirty="0" err="1"/>
+              <a:t>requires</a:t>
+            </a:r>
+            <a:r>
+              <a:rPr lang="de-DE" sz="2800" dirty="0"/>
+              <a:t> </a:t>
+            </a:r>
+            <a:r>
+              <a:rPr lang="de-DE" sz="2800" dirty="0" err="1"/>
+              <a:t>model</a:t>
+            </a:r>
+            <a:r>
+              <a:rPr lang="de-DE" sz="2800" dirty="0"/>
+              <a:t> </a:t>
+            </a:r>
+            <a:r>
+              <a:rPr lang="de-DE" sz="2800" dirty="0" err="1"/>
+              <a:t>of</a:t>
+            </a:r>
+            <a:r>
+              <a:rPr lang="de-DE" sz="2800" dirty="0"/>
+              <a:t> </a:t>
+            </a:r>
+            <a:r>
+              <a:rPr lang="de-DE" sz="2800" dirty="0" err="1"/>
+              <a:t>the</a:t>
+            </a:r>
+            <a:r>
+              <a:rPr lang="de-DE" sz="2800" dirty="0"/>
+              <a:t> </a:t>
+            </a:r>
+            <a:r>
+              <a:rPr lang="de-DE" sz="2800" dirty="0" err="1"/>
+              <a:t>system</a:t>
+            </a:r>
+            <a:endParaRPr lang="de-DE" sz="2800" dirty="0"/>
+          </a:p>
+        </p:txBody>
+      </p:sp>
     </p:spTree>
     <p:extLst>
       <p:ext uri="{BB962C8B-B14F-4D97-AF65-F5344CB8AC3E}">
-        <p14:creationId xmlns:p14="http://schemas.microsoft.com/office/powerpoint/2010/main" val="3577462619"/>
+        <p14:creationId xmlns:p14="http://schemas.microsoft.com/office/powerpoint/2010/main" val="1982465593"/>
       </p:ext>
     </p:extLst>
   </p:cSld>
@@ -6000,10 +5720,10 @@
       </p:grpSpPr>
       <p:sp>
         <p:nvSpPr>
-          <p:cNvPr id="5" name="Titel 4">
-            <a:extLst>
-              <a:ext uri="{FF2B5EF4-FFF2-40B4-BE49-F238E27FC236}">
-                <a16:creationId xmlns:a16="http://schemas.microsoft.com/office/drawing/2014/main" id="{9BDD4F3A-3E4C-26B4-00F6-415FE8B71657}"/>
+          <p:cNvPr id="2" name="Titel 1">
+            <a:extLst>
+              <a:ext uri="{FF2B5EF4-FFF2-40B4-BE49-F238E27FC236}">
+                <a16:creationId xmlns:a16="http://schemas.microsoft.com/office/drawing/2014/main" id="{3B8A2272-09A0-29C7-D5BB-316D88A76133}"/>
               </a:ext>
             </a:extLst>
           </p:cNvPr>
@@ -6020,35 +5740,34 @@
           <a:lstStyle/>
           <a:p>
             <a:r>
-              <a:rPr lang="de-DE" dirty="0" err="1"/>
-              <a:t>When</a:t>
-            </a:r>
-            <a:r>
-              <a:rPr lang="de-DE" dirty="0"/>
-              <a:t> </a:t>
-            </a:r>
-            <a:r>
-              <a:rPr lang="de-DE" dirty="0" err="1"/>
-              <a:t>to</a:t>
-            </a:r>
-            <a:r>
-              <a:rPr lang="de-DE" dirty="0"/>
-              <a:t> Use </a:t>
-            </a:r>
-            <a:r>
-              <a:rPr lang="de-DE" dirty="0" err="1"/>
-              <a:t>What</a:t>
-            </a:r>
-            <a:endParaRPr lang="de-DE" dirty="0"/>
-          </a:p>
-        </p:txBody>
-      </p:sp>
-      <p:sp>
-        <p:nvSpPr>
-          <p:cNvPr id="6" name="Inhaltsplatzhalter 5">
-            <a:extLst>
-              <a:ext uri="{FF2B5EF4-FFF2-40B4-BE49-F238E27FC236}">
-                <a16:creationId xmlns:a16="http://schemas.microsoft.com/office/drawing/2014/main" id="{E3BE372B-1868-A425-7C37-1EA565B7204B}"/>
+              <a:rPr lang="de-DE" dirty="0"/>
+              <a:t>Model-Free </a:t>
+            </a:r>
+            <a:r>
+              <a:rPr lang="de-DE" dirty="0" err="1"/>
+              <a:t>vs</a:t>
+            </a:r>
+            <a:r>
+              <a:rPr lang="de-DE" dirty="0"/>
+              <a:t> Model-</a:t>
+            </a:r>
+            <a:r>
+              <a:rPr lang="de-DE" dirty="0" err="1"/>
+              <a:t>Based</a:t>
+            </a:r>
+            <a:r>
+              <a:rPr lang="de-DE" dirty="0"/>
+              <a:t> Control</a:t>
+            </a:r>
+          </a:p>
+        </p:txBody>
+      </p:sp>
+      <p:sp>
+        <p:nvSpPr>
+          <p:cNvPr id="3" name="Inhaltsplatzhalter 2">
+            <a:extLst>
+              <a:ext uri="{FF2B5EF4-FFF2-40B4-BE49-F238E27FC236}">
+                <a16:creationId xmlns:a16="http://schemas.microsoft.com/office/drawing/2014/main" id="{532AFCA5-C3C8-DCB7-30F6-67F9812C7042}"/>
               </a:ext>
             </a:extLst>
           </p:cNvPr>
@@ -6066,104 +5785,186 @@
           </a:bodyPr>
           <a:lstStyle/>
           <a:p>
-            <a:pPr marL="0" indent="0">
-              <a:buNone/>
-            </a:pPr>
-            <a:r>
-              <a:rPr lang="de-DE" dirty="0" err="1"/>
-              <a:t>rule</a:t>
-            </a:r>
-            <a:r>
-              <a:rPr lang="de-DE" dirty="0"/>
-              <a:t> </a:t>
-            </a:r>
-            <a:r>
-              <a:rPr lang="de-DE" dirty="0" err="1"/>
-              <a:t>of</a:t>
-            </a:r>
-            <a:r>
-              <a:rPr lang="de-DE" dirty="0"/>
-              <a:t> </a:t>
-            </a:r>
-            <a:r>
-              <a:rPr lang="de-DE" dirty="0" err="1"/>
-              <a:t>thumb</a:t>
-            </a:r>
-            <a:r>
-              <a:rPr lang="de-DE" dirty="0"/>
-              <a:t>:</a:t>
-            </a:r>
-          </a:p>
-          <a:p>
-            <a:r>
-              <a:rPr lang="de-DE" dirty="0"/>
-              <a:t>PID: simple </a:t>
-            </a:r>
-            <a:r>
-              <a:rPr lang="de-DE" dirty="0" err="1"/>
-              <a:t>loops</a:t>
+            <a:r>
+              <a:rPr lang="de-DE" dirty="0"/>
+              <a:t>model-</a:t>
+            </a:r>
+            <a:r>
+              <a:rPr lang="de-DE" dirty="0" err="1"/>
+              <a:t>based</a:t>
+            </a:r>
+            <a:r>
+              <a:rPr lang="de-DE" dirty="0"/>
+              <a:t> </a:t>
+            </a:r>
+            <a:r>
+              <a:rPr lang="de-DE" dirty="0" err="1"/>
+              <a:t>control</a:t>
+            </a:r>
+            <a:r>
+              <a:rPr lang="de-DE" dirty="0"/>
+              <a:t> (MPC): </a:t>
+            </a:r>
+            <a:r>
+              <a:rPr lang="de-DE" dirty="0" err="1"/>
+              <a:t>uses</a:t>
+            </a:r>
+            <a:r>
+              <a:rPr lang="de-DE" dirty="0"/>
+              <a:t> a </a:t>
+            </a:r>
+            <a:r>
+              <a:rPr lang="de-DE" dirty="0" err="1"/>
+              <a:t>system</a:t>
+            </a:r>
+            <a:r>
+              <a:rPr lang="de-DE" dirty="0"/>
+              <a:t> </a:t>
+            </a:r>
+            <a:r>
+              <a:rPr lang="de-DE" dirty="0" err="1"/>
+              <a:t>model</a:t>
+            </a:r>
+            <a:r>
+              <a:rPr lang="de-DE" dirty="0"/>
+              <a:t> </a:t>
+            </a:r>
+            <a:r>
+              <a:rPr lang="de-DE" dirty="0" err="1"/>
+              <a:t>to</a:t>
+            </a:r>
+            <a:r>
+              <a:rPr lang="de-DE" dirty="0"/>
+              <a:t> plan </a:t>
+            </a:r>
+            <a:r>
+              <a:rPr lang="de-DE" dirty="0" err="1"/>
+              <a:t>or</a:t>
+            </a:r>
+            <a:r>
+              <a:rPr lang="de-DE" dirty="0"/>
+              <a:t> </a:t>
+            </a:r>
+            <a:r>
+              <a:rPr lang="de-DE" dirty="0" err="1"/>
+              <a:t>optimize</a:t>
+            </a:r>
+            <a:r>
+              <a:rPr lang="de-DE" dirty="0"/>
+              <a:t> </a:t>
+            </a:r>
+            <a:r>
+              <a:rPr lang="de-DE" dirty="0" err="1"/>
+              <a:t>actions</a:t>
             </a:r>
             <a:endParaRPr lang="de-DE" dirty="0"/>
           </a:p>
           <a:p>
             <a:r>
               <a:rPr lang="de-DE" dirty="0"/>
-              <a:t>MPC: </a:t>
-            </a:r>
-            <a:r>
-              <a:rPr lang="de-DE" dirty="0" err="1"/>
-              <a:t>constrained</a:t>
-            </a:r>
-            <a:r>
-              <a:rPr lang="de-DE" dirty="0"/>
-              <a:t> multivariable </a:t>
+              <a:t>model-</a:t>
+            </a:r>
+            <a:r>
+              <a:rPr lang="de-DE" dirty="0" err="1"/>
+              <a:t>free</a:t>
+            </a:r>
+            <a:r>
+              <a:rPr lang="de-DE" dirty="0"/>
+              <a:t> </a:t>
+            </a:r>
+            <a:r>
+              <a:rPr lang="de-DE" dirty="0" err="1"/>
+              <a:t>reinforcement</a:t>
+            </a:r>
+            <a:r>
+              <a:rPr lang="de-DE" dirty="0"/>
+              <a:t> </a:t>
+            </a:r>
+            <a:r>
+              <a:rPr lang="de-DE" dirty="0" err="1"/>
+              <a:t>learning</a:t>
+            </a:r>
+            <a:r>
+              <a:rPr lang="de-DE" dirty="0"/>
+              <a:t> (RL): </a:t>
+            </a:r>
+            <a:r>
+              <a:rPr lang="de-DE" dirty="0" err="1"/>
+              <a:t>learns</a:t>
+            </a:r>
+            <a:r>
+              <a:rPr lang="de-DE" dirty="0"/>
+              <a:t> </a:t>
             </a:r>
             <a:r>
               <a:rPr lang="de-DE" dirty="0" err="1"/>
               <a:t>control</a:t>
             </a:r>
-            <a:endParaRPr lang="de-DE" dirty="0"/>
-          </a:p>
-          <a:p>
-            <a:r>
-              <a:rPr lang="de-DE" dirty="0"/>
-              <a:t>RL: </a:t>
-            </a:r>
-            <a:r>
-              <a:rPr lang="de-DE" dirty="0" err="1"/>
-              <a:t>complex</a:t>
-            </a:r>
-            <a:r>
-              <a:rPr lang="de-DE" dirty="0"/>
-              <a:t> </a:t>
-            </a:r>
-            <a:r>
-              <a:rPr lang="de-DE" dirty="0" err="1"/>
-              <a:t>systems</a:t>
-            </a:r>
-            <a:r>
-              <a:rPr lang="de-DE" dirty="0"/>
-              <a:t> </a:t>
-            </a:r>
-            <a:r>
-              <a:rPr lang="de-DE" dirty="0" err="1"/>
-              <a:t>without</a:t>
-            </a:r>
-            <a:r>
-              <a:rPr lang="de-DE" dirty="0"/>
-              <a:t> </a:t>
-            </a:r>
-            <a:r>
-              <a:rPr lang="de-DE" dirty="0" err="1"/>
-              <a:t>good</a:t>
-            </a:r>
-            <a:r>
-              <a:rPr lang="de-DE" dirty="0"/>
-              <a:t> </a:t>
-            </a:r>
-            <a:r>
-              <a:rPr lang="de-DE" dirty="0" err="1"/>
-              <a:t>models</a:t>
+            <a:r>
+              <a:rPr lang="de-DE" dirty="0"/>
+              <a:t> </a:t>
+            </a:r>
+            <a:r>
+              <a:rPr lang="de-DE" dirty="0" err="1"/>
+              <a:t>directly</a:t>
+            </a:r>
+            <a:r>
+              <a:rPr lang="de-DE" dirty="0"/>
+              <a:t> </a:t>
+            </a:r>
+            <a:r>
+              <a:rPr lang="de-DE" dirty="0" err="1"/>
+              <a:t>from</a:t>
+            </a:r>
+            <a:r>
+              <a:rPr lang="de-DE" dirty="0"/>
+              <a:t> </a:t>
+            </a:r>
+            <a:r>
+              <a:rPr lang="de-DE" dirty="0" err="1"/>
+              <a:t>interaction</a:t>
+            </a:r>
+            <a:r>
+              <a:rPr lang="de-DE" dirty="0"/>
+              <a:t> </a:t>
+            </a:r>
+            <a:r>
+              <a:rPr lang="de-DE" dirty="0">
+                <a:sym typeface="Wingdings" pitchFamily="2" charset="2"/>
+              </a:rPr>
+              <a:t></a:t>
+            </a:r>
+            <a:r>
+              <a:rPr lang="de-DE" dirty="0"/>
+              <a:t> </a:t>
+            </a:r>
+            <a:r>
+              <a:rPr lang="de-DE" dirty="0" err="1"/>
+              <a:t>no</a:t>
+            </a:r>
+            <a:r>
+              <a:rPr lang="de-DE" dirty="0"/>
+              <a:t> explicit </a:t>
+            </a:r>
+            <a:r>
+              <a:rPr lang="de-DE" dirty="0" err="1"/>
+              <a:t>system</a:t>
+            </a:r>
+            <a:r>
+              <a:rPr lang="de-DE" dirty="0"/>
+              <a:t> </a:t>
+            </a:r>
+            <a:r>
+              <a:rPr lang="de-DE" dirty="0" err="1"/>
+              <a:t>model</a:t>
+            </a:r>
+            <a:r>
+              <a:rPr lang="de-DE" dirty="0"/>
+              <a:t> </a:t>
+            </a:r>
+            <a:r>
+              <a:rPr lang="de-DE" dirty="0" err="1"/>
+              <a:t>needed</a:t>
             </a:r>
             <a:endParaRPr lang="de-DE" dirty="0"/>
           </a:p>
@@ -6178,135 +5979,128 @@
               <a:buNone/>
             </a:pPr>
             <a:r>
-              <a:rPr lang="de-DE" dirty="0" err="1"/>
-              <a:t>many</a:t>
-            </a:r>
-            <a:r>
-              <a:rPr lang="de-DE" dirty="0"/>
-              <a:t> modern </a:t>
-            </a:r>
-            <a:r>
-              <a:rPr lang="de-DE" dirty="0" err="1"/>
-              <a:t>systems</a:t>
-            </a:r>
-            <a:r>
-              <a:rPr lang="de-DE" dirty="0"/>
-              <a:t> </a:t>
-            </a:r>
-            <a:r>
-              <a:rPr lang="de-DE" dirty="0" err="1"/>
-              <a:t>combine</a:t>
-            </a:r>
-            <a:r>
-              <a:rPr lang="de-DE" dirty="0"/>
-              <a:t> </a:t>
-            </a:r>
-            <a:r>
-              <a:rPr lang="de-DE" dirty="0" err="1"/>
-              <a:t>them</a:t>
-            </a:r>
-            <a:r>
-              <a:rPr lang="de-DE" dirty="0"/>
-              <a:t>:</a:t>
-            </a:r>
-          </a:p>
-          <a:p>
-            <a:r>
-              <a:rPr lang="de-DE" dirty="0"/>
-              <a:t>PID </a:t>
-            </a:r>
-            <a:r>
-              <a:rPr lang="de-DE" dirty="0" err="1"/>
-              <a:t>for</a:t>
-            </a:r>
-            <a:r>
-              <a:rPr lang="de-DE" dirty="0"/>
-              <a:t> </a:t>
-            </a:r>
-            <a:r>
-              <a:rPr lang="de-DE" dirty="0" err="1"/>
-              <a:t>low</a:t>
-            </a:r>
-            <a:r>
-              <a:rPr lang="de-DE" dirty="0"/>
-              <a:t>-level </a:t>
-            </a:r>
-            <a:r>
-              <a:rPr lang="de-DE" dirty="0" err="1"/>
-              <a:t>control</a:t>
+              <a:rPr lang="de-DE" dirty="0"/>
+              <a:t>trade-off:</a:t>
+            </a:r>
+          </a:p>
+          <a:p>
+            <a:r>
+              <a:rPr lang="de-DE" dirty="0"/>
+              <a:t>model-</a:t>
+            </a:r>
+            <a:r>
+              <a:rPr lang="de-DE" dirty="0" err="1"/>
+              <a:t>based</a:t>
+            </a:r>
+            <a:r>
+              <a:rPr lang="de-DE" dirty="0"/>
+              <a:t>: sample </a:t>
+            </a:r>
+            <a:r>
+              <a:rPr lang="de-DE" dirty="0" err="1"/>
+              <a:t>efficient</a:t>
+            </a:r>
+            <a:r>
+              <a:rPr lang="de-DE" dirty="0"/>
+              <a:t>, </a:t>
+            </a:r>
+            <a:r>
+              <a:rPr lang="de-DE" dirty="0" err="1"/>
+              <a:t>predictive</a:t>
+            </a:r>
+            <a:r>
+              <a:rPr lang="de-DE" dirty="0"/>
+              <a:t>, </a:t>
+            </a:r>
+            <a:r>
+              <a:rPr lang="de-DE" dirty="0" err="1"/>
+              <a:t>naturally</a:t>
+            </a:r>
+            <a:r>
+              <a:rPr lang="de-DE" dirty="0"/>
+              <a:t> </a:t>
+            </a:r>
+            <a:r>
+              <a:rPr lang="de-DE" dirty="0" err="1"/>
+              <a:t>handles</a:t>
+            </a:r>
+            <a:r>
+              <a:rPr lang="de-DE" dirty="0"/>
+              <a:t> </a:t>
+            </a:r>
+            <a:r>
+              <a:rPr lang="de-DE" dirty="0" err="1"/>
+              <a:t>constraints</a:t>
             </a:r>
             <a:endParaRPr lang="de-DE" dirty="0"/>
           </a:p>
           <a:p>
             <a:r>
               <a:rPr lang="de-DE" dirty="0"/>
-              <a:t>MPC </a:t>
-            </a:r>
-            <a:r>
-              <a:rPr lang="de-DE" dirty="0" err="1"/>
-              <a:t>for</a:t>
-            </a:r>
-            <a:r>
-              <a:rPr lang="de-DE" dirty="0"/>
-              <a:t> high-level </a:t>
-            </a:r>
-            <a:r>
-              <a:rPr lang="de-DE" dirty="0" err="1"/>
-              <a:t>trajectory</a:t>
-            </a:r>
-            <a:r>
-              <a:rPr lang="de-DE" dirty="0"/>
-              <a:t> </a:t>
-            </a:r>
-            <a:r>
-              <a:rPr lang="de-DE" dirty="0" err="1"/>
-              <a:t>optimization</a:t>
+              <a:t>model-</a:t>
+            </a:r>
+            <a:r>
+              <a:rPr lang="de-DE" dirty="0" err="1"/>
+              <a:t>free</a:t>
+            </a:r>
+            <a:r>
+              <a:rPr lang="de-DE" dirty="0"/>
+              <a:t>: flexible, </a:t>
+            </a:r>
+            <a:r>
+              <a:rPr lang="de-DE" dirty="0" err="1"/>
+              <a:t>works</a:t>
+            </a:r>
+            <a:r>
+              <a:rPr lang="de-DE" dirty="0"/>
+              <a:t> </a:t>
+            </a:r>
+            <a:r>
+              <a:rPr lang="de-DE" dirty="0" err="1"/>
+              <a:t>with</a:t>
+            </a:r>
+            <a:r>
+              <a:rPr lang="de-DE" dirty="0"/>
+              <a:t> </a:t>
+            </a:r>
+            <a:r>
+              <a:rPr lang="de-DE" dirty="0" err="1"/>
+              <a:t>unknown</a:t>
+            </a:r>
+            <a:r>
+              <a:rPr lang="de-DE" dirty="0"/>
+              <a:t> </a:t>
+            </a:r>
+            <a:r>
+              <a:rPr lang="de-DE" dirty="0" err="1"/>
+              <a:t>dynamics</a:t>
+            </a:r>
+            <a:r>
+              <a:rPr lang="de-DE" dirty="0"/>
+              <a:t>, </a:t>
+            </a:r>
+            <a:r>
+              <a:rPr lang="de-DE" dirty="0" err="1"/>
+              <a:t>maximizes</a:t>
+            </a:r>
+            <a:r>
+              <a:rPr lang="de-DE" dirty="0"/>
+              <a:t> </a:t>
+            </a:r>
+            <a:r>
+              <a:rPr lang="de-DE" dirty="0" err="1"/>
+              <a:t>long</a:t>
+            </a:r>
+            <a:r>
+              <a:rPr lang="de-DE" dirty="0"/>
+              <a:t>-term </a:t>
+            </a:r>
+            <a:r>
+              <a:rPr lang="de-DE" dirty="0" err="1"/>
+              <a:t>reward</a:t>
             </a:r>
             <a:endParaRPr lang="de-DE" dirty="0"/>
           </a:p>
-          <a:p>
-            <a:r>
-              <a:rPr lang="de-DE" dirty="0"/>
-              <a:t>RL </a:t>
-            </a:r>
-            <a:r>
-              <a:rPr lang="de-DE" dirty="0" err="1"/>
-              <a:t>for</a:t>
-            </a:r>
-            <a:r>
-              <a:rPr lang="de-DE" dirty="0"/>
-              <a:t> </a:t>
-            </a:r>
-            <a:r>
-              <a:rPr lang="de-DE" dirty="0" err="1"/>
-              <a:t>strategy</a:t>
-            </a:r>
-            <a:r>
-              <a:rPr lang="de-DE" dirty="0"/>
-              <a:t> </a:t>
-            </a:r>
-            <a:r>
-              <a:rPr lang="de-DE" dirty="0" err="1"/>
-              <a:t>or</a:t>
-            </a:r>
-            <a:r>
-              <a:rPr lang="de-DE" dirty="0"/>
-              <a:t> </a:t>
-            </a:r>
-            <a:r>
-              <a:rPr lang="de-DE" dirty="0" err="1"/>
-              <a:t>policy</a:t>
-            </a:r>
-            <a:r>
-              <a:rPr lang="de-DE" dirty="0"/>
-              <a:t> </a:t>
-            </a:r>
-            <a:r>
-              <a:rPr lang="de-DE" dirty="0" err="1"/>
-              <a:t>learning</a:t>
-            </a:r>
-            <a:endParaRPr lang="de-DE" dirty="0"/>
-          </a:p>
         </p:txBody>
       </p:sp>
       <p:sp>
@@ -6314,7 +6108,7 @@
           <p:cNvPr id="4" name="Foliennummernplatzhalter 3">
             <a:extLst>
               <a:ext uri="{FF2B5EF4-FFF2-40B4-BE49-F238E27FC236}">
-                <a16:creationId xmlns:a16="http://schemas.microsoft.com/office/drawing/2014/main" id="{67F8ABDB-BD75-2ABA-AAB8-FAC0702D29FB}"/>
+                <a16:creationId xmlns:a16="http://schemas.microsoft.com/office/drawing/2014/main" id="{2807D302-1C4F-333A-A8C7-609A4212E029}"/>
               </a:ext>
             </a:extLst>
           </p:cNvPr>
@@ -6333,6 +6127,376 @@
             <a:fld id="{08C366F5-AFAD-49CB-854A-9D9E238FCA13}" type="slidenum">
               <a:rPr lang="en-GB" smtClean="0"/>
               <a:t>8</a:t>
+            </a:fld>
+            <a:endParaRPr lang="en-GB"/>
+          </a:p>
+        </p:txBody>
+      </p:sp>
+    </p:spTree>
+    <p:extLst>
+      <p:ext uri="{BB962C8B-B14F-4D97-AF65-F5344CB8AC3E}">
+        <p14:creationId xmlns:p14="http://schemas.microsoft.com/office/powerpoint/2010/main" val="3577462619"/>
+      </p:ext>
+    </p:extLst>
+  </p:cSld>
+  <p:clrMapOvr>
+    <a:masterClrMapping/>
+  </p:clrMapOvr>
+</p:sld>
+</file>
+
+<file path=ppt/slides/slide9.xml><?xml version="1.0" encoding="utf-8"?>
+<p:sld xmlns:a="http://schemas.openxmlformats.org/drawingml/2006/main" xmlns:r="http://schemas.openxmlformats.org/officeDocument/2006/relationships" xmlns:p="http://schemas.openxmlformats.org/presentationml/2006/main">
+  <p:cSld>
+    <p:spTree>
+      <p:nvGrpSpPr>
+        <p:cNvPr id="1" name=""/>
+        <p:cNvGrpSpPr/>
+        <p:nvPr/>
+      </p:nvGrpSpPr>
+      <p:grpSpPr>
+        <a:xfrm>
+          <a:off x="0" y="0"/>
+          <a:ext cx="0" cy="0"/>
+          <a:chOff x="0" y="0"/>
+          <a:chExt cx="0" cy="0"/>
+        </a:xfrm>
+      </p:grpSpPr>
+      <p:sp>
+        <p:nvSpPr>
+          <p:cNvPr id="5" name="Titel 4">
+            <a:extLst>
+              <a:ext uri="{FF2B5EF4-FFF2-40B4-BE49-F238E27FC236}">
+                <a16:creationId xmlns:a16="http://schemas.microsoft.com/office/drawing/2014/main" id="{9BDD4F3A-3E4C-26B4-00F6-415FE8B71657}"/>
+              </a:ext>
+            </a:extLst>
+          </p:cNvPr>
+          <p:cNvSpPr>
+            <a:spLocks noGrp="1"/>
+          </p:cNvSpPr>
+          <p:nvPr>
+            <p:ph type="title"/>
+          </p:nvPr>
+        </p:nvSpPr>
+        <p:spPr/>
+        <p:txBody>
+          <a:bodyPr/>
+          <a:lstStyle/>
+          <a:p>
+            <a:r>
+              <a:rPr lang="de-DE" dirty="0" err="1"/>
+              <a:t>When</a:t>
+            </a:r>
+            <a:r>
+              <a:rPr lang="de-DE" dirty="0"/>
+              <a:t> </a:t>
+            </a:r>
+            <a:r>
+              <a:rPr lang="de-DE" dirty="0" err="1"/>
+              <a:t>to</a:t>
+            </a:r>
+            <a:r>
+              <a:rPr lang="de-DE" dirty="0"/>
+              <a:t> Use </a:t>
+            </a:r>
+            <a:r>
+              <a:rPr lang="de-DE" dirty="0" err="1"/>
+              <a:t>What</a:t>
+            </a:r>
+            <a:endParaRPr lang="de-DE" dirty="0"/>
+          </a:p>
+        </p:txBody>
+      </p:sp>
+      <p:sp>
+        <p:nvSpPr>
+          <p:cNvPr id="6" name="Inhaltsplatzhalter 5">
+            <a:extLst>
+              <a:ext uri="{FF2B5EF4-FFF2-40B4-BE49-F238E27FC236}">
+                <a16:creationId xmlns:a16="http://schemas.microsoft.com/office/drawing/2014/main" id="{E3BE372B-1868-A425-7C37-1EA565B7204B}"/>
+              </a:ext>
+            </a:extLst>
+          </p:cNvPr>
+          <p:cNvSpPr>
+            <a:spLocks noGrp="1"/>
+          </p:cNvSpPr>
+          <p:nvPr>
+            <p:ph idx="1"/>
+          </p:nvPr>
+        </p:nvSpPr>
+        <p:spPr/>
+        <p:txBody>
+          <a:bodyPr>
+            <a:normAutofit lnSpcReduction="10000"/>
+          </a:bodyPr>
+          <a:lstStyle/>
+          <a:p>
+            <a:pPr marL="0" indent="0">
+              <a:buNone/>
+            </a:pPr>
+            <a:r>
+              <a:rPr lang="de-DE" dirty="0" err="1"/>
+              <a:t>rule</a:t>
+            </a:r>
+            <a:r>
+              <a:rPr lang="de-DE" dirty="0"/>
+              <a:t> </a:t>
+            </a:r>
+            <a:r>
+              <a:rPr lang="de-DE" dirty="0" err="1"/>
+              <a:t>of</a:t>
+            </a:r>
+            <a:r>
+              <a:rPr lang="de-DE" dirty="0"/>
+              <a:t> </a:t>
+            </a:r>
+            <a:r>
+              <a:rPr lang="de-DE" dirty="0" err="1"/>
+              <a:t>thumb</a:t>
+            </a:r>
+            <a:r>
+              <a:rPr lang="de-DE" dirty="0"/>
+              <a:t>:</a:t>
+            </a:r>
+          </a:p>
+          <a:p>
+            <a:r>
+              <a:rPr lang="de-DE" dirty="0"/>
+              <a:t>PID: simple </a:t>
+            </a:r>
+            <a:r>
+              <a:rPr lang="de-DE" dirty="0" err="1"/>
+              <a:t>loops</a:t>
+            </a:r>
+            <a:endParaRPr lang="de-DE" dirty="0"/>
+          </a:p>
+          <a:p>
+            <a:r>
+              <a:rPr lang="de-DE" dirty="0"/>
+              <a:t>MPC: </a:t>
+            </a:r>
+            <a:r>
+              <a:rPr lang="de-DE" dirty="0" err="1"/>
+              <a:t>constrained</a:t>
+            </a:r>
+            <a:r>
+              <a:rPr lang="de-DE" dirty="0"/>
+              <a:t> multivariable </a:t>
+            </a:r>
+            <a:r>
+              <a:rPr lang="de-DE" dirty="0" err="1"/>
+              <a:t>control</a:t>
+            </a:r>
+            <a:endParaRPr lang="de-DE" dirty="0"/>
+          </a:p>
+          <a:p>
+            <a:r>
+              <a:rPr lang="de-DE" dirty="0"/>
+              <a:t>RL: </a:t>
+            </a:r>
+            <a:r>
+              <a:rPr lang="de-DE" dirty="0" err="1"/>
+              <a:t>complex</a:t>
+            </a:r>
+            <a:r>
+              <a:rPr lang="de-DE" dirty="0"/>
+              <a:t> </a:t>
+            </a:r>
+            <a:r>
+              <a:rPr lang="de-DE" dirty="0" err="1"/>
+              <a:t>systems</a:t>
+            </a:r>
+            <a:r>
+              <a:rPr lang="de-DE" dirty="0"/>
+              <a:t> </a:t>
+            </a:r>
+            <a:r>
+              <a:rPr lang="de-DE" dirty="0" err="1"/>
+              <a:t>without</a:t>
+            </a:r>
+            <a:r>
+              <a:rPr lang="de-DE" dirty="0"/>
+              <a:t> </a:t>
+            </a:r>
+            <a:r>
+              <a:rPr lang="de-DE" dirty="0" err="1"/>
+              <a:t>good</a:t>
+            </a:r>
+            <a:r>
+              <a:rPr lang="de-DE" dirty="0"/>
+              <a:t> </a:t>
+            </a:r>
+            <a:r>
+              <a:rPr lang="de-DE" dirty="0" err="1"/>
+              <a:t>models</a:t>
+            </a:r>
+            <a:endParaRPr lang="de-DE" dirty="0"/>
+          </a:p>
+          <a:p>
+            <a:pPr marL="0" indent="0">
+              <a:buNone/>
+            </a:pPr>
+            <a:endParaRPr lang="de-DE" dirty="0"/>
+          </a:p>
+          <a:p>
+            <a:pPr marL="0" indent="0">
+              <a:buNone/>
+            </a:pPr>
+            <a:r>
+              <a:rPr lang="de-DE" dirty="0" err="1"/>
+              <a:t>many</a:t>
+            </a:r>
+            <a:r>
+              <a:rPr lang="de-DE" dirty="0"/>
+              <a:t> modern </a:t>
+            </a:r>
+            <a:r>
+              <a:rPr lang="de-DE" dirty="0" err="1"/>
+              <a:t>systems</a:t>
+            </a:r>
+            <a:r>
+              <a:rPr lang="de-DE" dirty="0"/>
+              <a:t> </a:t>
+            </a:r>
+            <a:r>
+              <a:rPr lang="de-DE" dirty="0" err="1"/>
+              <a:t>combine</a:t>
+            </a:r>
+            <a:r>
+              <a:rPr lang="de-DE" dirty="0"/>
+              <a:t> </a:t>
+            </a:r>
+            <a:r>
+              <a:rPr lang="de-DE" dirty="0" err="1"/>
+              <a:t>them</a:t>
+            </a:r>
+            <a:r>
+              <a:rPr lang="de-DE" dirty="0"/>
+              <a:t>:</a:t>
+            </a:r>
+          </a:p>
+          <a:p>
+            <a:r>
+              <a:rPr lang="de-DE" dirty="0"/>
+              <a:t>PID </a:t>
+            </a:r>
+            <a:r>
+              <a:rPr lang="de-DE" dirty="0" err="1"/>
+              <a:t>for</a:t>
+            </a:r>
+            <a:r>
+              <a:rPr lang="de-DE" dirty="0"/>
+              <a:t> </a:t>
+            </a:r>
+            <a:r>
+              <a:rPr lang="de-DE" dirty="0" err="1"/>
+              <a:t>low</a:t>
+            </a:r>
+            <a:r>
+              <a:rPr lang="de-DE" dirty="0"/>
+              <a:t>-level </a:t>
+            </a:r>
+            <a:r>
+              <a:rPr lang="de-DE" dirty="0" err="1"/>
+              <a:t>control</a:t>
+            </a:r>
+            <a:endParaRPr lang="de-DE" dirty="0"/>
+          </a:p>
+          <a:p>
+            <a:r>
+              <a:rPr lang="de-DE" dirty="0"/>
+              <a:t>MPC </a:t>
+            </a:r>
+            <a:r>
+              <a:rPr lang="de-DE" dirty="0" err="1"/>
+              <a:t>for</a:t>
+            </a:r>
+            <a:r>
+              <a:rPr lang="de-DE" dirty="0"/>
+              <a:t> high-level </a:t>
+            </a:r>
+            <a:r>
+              <a:rPr lang="de-DE" dirty="0" err="1"/>
+              <a:t>trajectory</a:t>
+            </a:r>
+            <a:r>
+              <a:rPr lang="de-DE" dirty="0"/>
+              <a:t> </a:t>
+            </a:r>
+            <a:r>
+              <a:rPr lang="de-DE" dirty="0" err="1"/>
+              <a:t>optimization</a:t>
+            </a:r>
+            <a:endParaRPr lang="de-DE" dirty="0"/>
+          </a:p>
+          <a:p>
+            <a:r>
+              <a:rPr lang="de-DE" dirty="0"/>
+              <a:t>RL </a:t>
+            </a:r>
+            <a:r>
+              <a:rPr lang="de-DE" dirty="0" err="1"/>
+              <a:t>for</a:t>
+            </a:r>
+            <a:r>
+              <a:rPr lang="de-DE" dirty="0"/>
+              <a:t> </a:t>
+            </a:r>
+            <a:r>
+              <a:rPr lang="de-DE" dirty="0" err="1"/>
+              <a:t>strategy</a:t>
+            </a:r>
+            <a:r>
+              <a:rPr lang="de-DE" dirty="0"/>
+              <a:t> </a:t>
+            </a:r>
+            <a:r>
+              <a:rPr lang="de-DE" dirty="0" err="1"/>
+              <a:t>or</a:t>
+            </a:r>
+            <a:r>
+              <a:rPr lang="de-DE" dirty="0"/>
+              <a:t> </a:t>
+            </a:r>
+            <a:r>
+              <a:rPr lang="de-DE" dirty="0" err="1"/>
+              <a:t>policy</a:t>
+            </a:r>
+            <a:r>
+              <a:rPr lang="de-DE" dirty="0"/>
+              <a:t> </a:t>
+            </a:r>
+            <a:r>
+              <a:rPr lang="de-DE" dirty="0" err="1"/>
+              <a:t>learning</a:t>
+            </a:r>
+            <a:endParaRPr lang="de-DE" dirty="0"/>
+          </a:p>
+        </p:txBody>
+      </p:sp>
+      <p:sp>
+        <p:nvSpPr>
+          <p:cNvPr id="4" name="Foliennummernplatzhalter 3">
+            <a:extLst>
+              <a:ext uri="{FF2B5EF4-FFF2-40B4-BE49-F238E27FC236}">
+                <a16:creationId xmlns:a16="http://schemas.microsoft.com/office/drawing/2014/main" id="{67F8ABDB-BD75-2ABA-AAB8-FAC0702D29FB}"/>
+              </a:ext>
+            </a:extLst>
+          </p:cNvPr>
+          <p:cNvSpPr>
+            <a:spLocks noGrp="1"/>
+          </p:cNvSpPr>
+          <p:nvPr>
+            <p:ph type="sldNum" sz="quarter" idx="12"/>
+          </p:nvPr>
+        </p:nvSpPr>
+        <p:spPr/>
+        <p:txBody>
+          <a:bodyPr/>
+          <a:lstStyle/>
+          <a:p>
+            <a:fld id="{08C366F5-AFAD-49CB-854A-9D9E238FCA13}" type="slidenum">
+              <a:rPr lang="en-GB" smtClean="0"/>
+              <a:t>9</a:t>
             </a:fld>
             <a:endParaRPr lang="en-GB"/>
           </a:p>
